--- a/.lessons/29 Fundamental Authorization ( Yalnız öz yazısını silə bilər A sayılır )/2 Authorization - Gates/1.pptx
+++ b/.lessons/29 Fundamental Authorization ( Yalnız öz yazısını silə bilər A sayılır )/2 Authorization - Gates/1.pptx
@@ -8,6 +8,17 @@
     <p:sldId id="402" r:id="rId2"/>
     <p:sldId id="403" r:id="rId3"/>
     <p:sldId id="400" r:id="rId4"/>
+    <p:sldId id="404" r:id="rId5"/>
+    <p:sldId id="406" r:id="rId6"/>
+    <p:sldId id="407" r:id="rId7"/>
+    <p:sldId id="408" r:id="rId8"/>
+    <p:sldId id="405" r:id="rId9"/>
+    <p:sldId id="409" r:id="rId10"/>
+    <p:sldId id="411" r:id="rId11"/>
+    <p:sldId id="414" r:id="rId12"/>
+    <p:sldId id="412" r:id="rId13"/>
+    <p:sldId id="413" r:id="rId14"/>
+    <p:sldId id="410" r:id="rId15"/>
   </p:sldIdLst>
   <p:sldSz cx="12192000" cy="6858000"/>
   <p:notesSz cx="6858000" cy="9144000"/>
@@ -261,7 +272,7 @@
           <a:p>
             <a:fld id="{3E102D2E-813C-461C-9963-687A650C48C0}" type="datetimeFigureOut">
               <a:rPr lang="en-US" smtClean="0"/>
-              <a:t>5/23/2025</a:t>
+              <a:t>6/2/2025</a:t>
             </a:fld>
             <a:endParaRPr lang="en-US"/>
           </a:p>
@@ -459,7 +470,7 @@
           <a:p>
             <a:fld id="{3E102D2E-813C-461C-9963-687A650C48C0}" type="datetimeFigureOut">
               <a:rPr lang="en-US" smtClean="0"/>
-              <a:t>5/23/2025</a:t>
+              <a:t>6/2/2025</a:t>
             </a:fld>
             <a:endParaRPr lang="en-US"/>
           </a:p>
@@ -667,7 +678,7 @@
           <a:p>
             <a:fld id="{3E102D2E-813C-461C-9963-687A650C48C0}" type="datetimeFigureOut">
               <a:rPr lang="en-US" smtClean="0"/>
-              <a:t>5/23/2025</a:t>
+              <a:t>6/2/2025</a:t>
             </a:fld>
             <a:endParaRPr lang="en-US"/>
           </a:p>
@@ -865,7 +876,7 @@
           <a:p>
             <a:fld id="{3E102D2E-813C-461C-9963-687A650C48C0}" type="datetimeFigureOut">
               <a:rPr lang="en-US" smtClean="0"/>
-              <a:t>5/23/2025</a:t>
+              <a:t>6/2/2025</a:t>
             </a:fld>
             <a:endParaRPr lang="en-US"/>
           </a:p>
@@ -1140,7 +1151,7 @@
           <a:p>
             <a:fld id="{3E102D2E-813C-461C-9963-687A650C48C0}" type="datetimeFigureOut">
               <a:rPr lang="en-US" smtClean="0"/>
-              <a:t>5/23/2025</a:t>
+              <a:t>6/2/2025</a:t>
             </a:fld>
             <a:endParaRPr lang="en-US"/>
           </a:p>
@@ -1405,7 +1416,7 @@
           <a:p>
             <a:fld id="{3E102D2E-813C-461C-9963-687A650C48C0}" type="datetimeFigureOut">
               <a:rPr lang="en-US" smtClean="0"/>
-              <a:t>5/23/2025</a:t>
+              <a:t>6/2/2025</a:t>
             </a:fld>
             <a:endParaRPr lang="en-US"/>
           </a:p>
@@ -1817,7 +1828,7 @@
           <a:p>
             <a:fld id="{3E102D2E-813C-461C-9963-687A650C48C0}" type="datetimeFigureOut">
               <a:rPr lang="en-US" smtClean="0"/>
-              <a:t>5/23/2025</a:t>
+              <a:t>6/2/2025</a:t>
             </a:fld>
             <a:endParaRPr lang="en-US"/>
           </a:p>
@@ -1958,7 +1969,7 @@
           <a:p>
             <a:fld id="{3E102D2E-813C-461C-9963-687A650C48C0}" type="datetimeFigureOut">
               <a:rPr lang="en-US" smtClean="0"/>
-              <a:t>5/23/2025</a:t>
+              <a:t>6/2/2025</a:t>
             </a:fld>
             <a:endParaRPr lang="en-US"/>
           </a:p>
@@ -2071,7 +2082,7 @@
           <a:p>
             <a:fld id="{3E102D2E-813C-461C-9963-687A650C48C0}" type="datetimeFigureOut">
               <a:rPr lang="en-US" smtClean="0"/>
-              <a:t>5/23/2025</a:t>
+              <a:t>6/2/2025</a:t>
             </a:fld>
             <a:endParaRPr lang="en-US"/>
           </a:p>
@@ -2382,7 +2393,7 @@
           <a:p>
             <a:fld id="{3E102D2E-813C-461C-9963-687A650C48C0}" type="datetimeFigureOut">
               <a:rPr lang="en-US" smtClean="0"/>
-              <a:t>5/23/2025</a:t>
+              <a:t>6/2/2025</a:t>
             </a:fld>
             <a:endParaRPr lang="en-US"/>
           </a:p>
@@ -2670,7 +2681,7 @@
           <a:p>
             <a:fld id="{3E102D2E-813C-461C-9963-687A650C48C0}" type="datetimeFigureOut">
               <a:rPr lang="en-US" smtClean="0"/>
-              <a:t>5/23/2025</a:t>
+              <a:t>6/2/2025</a:t>
             </a:fld>
             <a:endParaRPr lang="en-US"/>
           </a:p>
@@ -2911,7 +2922,7 @@
           <a:p>
             <a:fld id="{3E102D2E-813C-461C-9963-687A650C48C0}" type="datetimeFigureOut">
               <a:rPr lang="en-US" smtClean="0"/>
-              <a:t>5/23/2025</a:t>
+              <a:t>6/2/2025</a:t>
             </a:fld>
             <a:endParaRPr lang="en-US"/>
           </a:p>
@@ -3369,6 +3380,149 @@
               <a:buNone/>
             </a:pPr>
             <a:r>
+              <a:rPr lang="az-Latn-AZ" altLang="en-US" sz="1300">
+                <a:latin typeface="Arial" panose="020B0604020202020204" pitchFamily="34" charset="0"/>
+              </a:rPr>
+              <a:t>İndi </a:t>
+            </a:r>
+            <a:r>
+              <a:rPr lang="az-Latn-AZ" altLang="en-US" sz="1300" b="1">
+                <a:latin typeface="Arial" panose="020B0604020202020204" pitchFamily="34" charset="0"/>
+              </a:rPr>
+              <a:t>USERS</a:t>
+            </a:r>
+            <a:r>
+              <a:rPr lang="az-Latn-AZ" altLang="en-US" sz="1300">
+                <a:latin typeface="Arial" panose="020B0604020202020204" pitchFamily="34" charset="0"/>
+              </a:rPr>
+              <a:t> modelinə yeni </a:t>
+            </a:r>
+            <a:r>
+              <a:rPr lang="az-Latn-AZ" altLang="en-US" sz="1300" b="1">
+                <a:latin typeface="Arial" panose="020B0604020202020204" pitchFamily="34" charset="0"/>
+              </a:rPr>
+              <a:t>sütun</a:t>
+            </a:r>
+            <a:r>
+              <a:rPr lang="az-Latn-AZ" altLang="en-US" sz="1300">
+                <a:latin typeface="Arial" panose="020B0604020202020204" pitchFamily="34" charset="0"/>
+              </a:rPr>
+              <a:t> əlavə edəcəyik. </a:t>
+            </a:r>
+            <a:endParaRPr kumimoji="0" lang="en-US" altLang="en-US" sz="1300" b="0" i="0" u="none" strike="noStrike" cap="none" normalizeH="0" baseline="0">
+              <a:ln>
+                <a:noFill/>
+              </a:ln>
+              <a:solidFill>
+                <a:schemeClr val="tx1"/>
+              </a:solidFill>
+              <a:effectLst/>
+              <a:latin typeface="Arial" panose="020B0604020202020204" pitchFamily="34" charset="0"/>
+            </a:endParaRPr>
+          </a:p>
+        </p:txBody>
+      </p:sp>
+      <p:pic>
+        <p:nvPicPr>
+          <p:cNvPr id="4" name="Picture 3">
+            <a:extLst>
+              <a:ext uri="{FF2B5EF4-FFF2-40B4-BE49-F238E27FC236}">
+                <a16:creationId xmlns:a16="http://schemas.microsoft.com/office/drawing/2014/main" id="{36E31787-74D3-DEF4-5307-FF9AF382AD77}"/>
+              </a:ext>
+            </a:extLst>
+          </p:cNvPr>
+          <p:cNvPicPr>
+            <a:picLocks noChangeAspect="1"/>
+          </p:cNvPicPr>
+          <p:nvPr/>
+        </p:nvPicPr>
+        <p:blipFill>
+          <a:blip r:embed="rId2"/>
+          <a:stretch>
+            <a:fillRect/>
+          </a:stretch>
+        </p:blipFill>
+        <p:spPr>
+          <a:xfrm>
+            <a:off x="0" y="991922"/>
+            <a:ext cx="9335803" cy="1733792"/>
+          </a:xfrm>
+          <a:prstGeom prst="rect">
+            <a:avLst/>
+          </a:prstGeom>
+        </p:spPr>
+      </p:pic>
+    </p:spTree>
+    <p:extLst>
+      <p:ext uri="{BB962C8B-B14F-4D97-AF65-F5344CB8AC3E}">
+        <p14:creationId xmlns:p14="http://schemas.microsoft.com/office/powerpoint/2010/main" val="2486611332"/>
+      </p:ext>
+    </p:extLst>
+  </p:cSld>
+  <p:clrMapOvr>
+    <a:masterClrMapping/>
+  </p:clrMapOvr>
+</p:sld>
+</file>
+
+<file path=ppt/slides/slide10.xml><?xml version="1.0" encoding="utf-8"?>
+<p:sld xmlns:a="http://schemas.openxmlformats.org/drawingml/2006/main" xmlns:r="http://schemas.openxmlformats.org/officeDocument/2006/relationships" xmlns:p="http://schemas.openxmlformats.org/presentationml/2006/main">
+  <p:cSld>
+    <p:spTree>
+      <p:nvGrpSpPr>
+        <p:cNvPr id="1" name="">
+          <a:extLst>
+            <a:ext uri="{FF2B5EF4-FFF2-40B4-BE49-F238E27FC236}">
+              <a16:creationId xmlns:a16="http://schemas.microsoft.com/office/drawing/2014/main" id="{C7F66B8F-7975-18F2-895D-FE49130D5871}"/>
+            </a:ext>
+          </a:extLst>
+        </p:cNvPr>
+        <p:cNvGrpSpPr/>
+        <p:nvPr/>
+      </p:nvGrpSpPr>
+      <p:grpSpPr>
+        <a:xfrm>
+          <a:off x="0" y="0"/>
+          <a:ext cx="0" cy="0"/>
+          <a:chOff x="0" y="0"/>
+          <a:chExt cx="0" cy="0"/>
+        </a:xfrm>
+      </p:grpSpPr>
+      <p:sp>
+        <p:nvSpPr>
+          <p:cNvPr id="3" name="TextBox 2">
+            <a:extLst>
+              <a:ext uri="{FF2B5EF4-FFF2-40B4-BE49-F238E27FC236}">
+                <a16:creationId xmlns:a16="http://schemas.microsoft.com/office/drawing/2014/main" id="{A1C6EB2C-0DE2-4507-83BD-21DFC7BC98E0}"/>
+              </a:ext>
+            </a:extLst>
+          </p:cNvPr>
+          <p:cNvSpPr txBox="1"/>
+          <p:nvPr/>
+        </p:nvSpPr>
+        <p:spPr>
+          <a:xfrm>
+            <a:off x="217714" y="255046"/>
+            <a:ext cx="11756571" cy="355354"/>
+          </a:xfrm>
+          <a:prstGeom prst="rect">
+            <a:avLst/>
+          </a:prstGeom>
+          <a:noFill/>
+        </p:spPr>
+        <p:txBody>
+          <a:bodyPr wrap="square">
+            <a:spAutoFit/>
+          </a:bodyPr>
+          <a:lstStyle/>
+          <a:p>
+            <a:pPr>
+              <a:lnSpc>
+                <a:spcPct val="150000"/>
+              </a:lnSpc>
+              <a:buNone/>
+            </a:pPr>
+            <a:r>
               <a:rPr kumimoji="0" lang="en-US" altLang="en-US" sz="1300" b="0" i="0" u="none" strike="noStrike" cap="none" normalizeH="0" baseline="0">
                 <a:ln>
                   <a:noFill/>
@@ -3379,15 +3533,449 @@
                 <a:effectLst/>
                 <a:latin typeface="Arial" panose="020B0604020202020204" pitchFamily="34" charset="0"/>
               </a:rPr>
-              <a:t>.</a:t>
-            </a:r>
-          </a:p>
-        </p:txBody>
-      </p:sp>
+              <a:t>app\Http\Controllers\PostController.php</a:t>
+            </a:r>
+          </a:p>
+        </p:txBody>
+      </p:sp>
+      <p:pic>
+        <p:nvPicPr>
+          <p:cNvPr id="8" name="Picture 7">
+            <a:extLst>
+              <a:ext uri="{FF2B5EF4-FFF2-40B4-BE49-F238E27FC236}">
+                <a16:creationId xmlns:a16="http://schemas.microsoft.com/office/drawing/2014/main" id="{E103966C-C9D5-59D6-564D-1E5B6D244441}"/>
+              </a:ext>
+            </a:extLst>
+          </p:cNvPr>
+          <p:cNvPicPr>
+            <a:picLocks noChangeAspect="1"/>
+          </p:cNvPicPr>
+          <p:nvPr/>
+        </p:nvPicPr>
+        <p:blipFill>
+          <a:blip r:embed="rId2"/>
+          <a:stretch>
+            <a:fillRect/>
+          </a:stretch>
+        </p:blipFill>
+        <p:spPr>
+          <a:xfrm>
+            <a:off x="7064751" y="0"/>
+            <a:ext cx="5127249" cy="6858000"/>
+          </a:xfrm>
+          <a:prstGeom prst="rect">
+            <a:avLst/>
+          </a:prstGeom>
+        </p:spPr>
+      </p:pic>
     </p:spTree>
     <p:extLst>
       <p:ext uri="{BB962C8B-B14F-4D97-AF65-F5344CB8AC3E}">
-        <p14:creationId xmlns:p14="http://schemas.microsoft.com/office/powerpoint/2010/main" val="2486611332"/>
+        <p14:creationId xmlns:p14="http://schemas.microsoft.com/office/powerpoint/2010/main" val="887135723"/>
+      </p:ext>
+    </p:extLst>
+  </p:cSld>
+  <p:clrMapOvr>
+    <a:masterClrMapping/>
+  </p:clrMapOvr>
+</p:sld>
+</file>
+
+<file path=ppt/slides/slide11.xml><?xml version="1.0" encoding="utf-8"?>
+<p:sld xmlns:a="http://schemas.openxmlformats.org/drawingml/2006/main" xmlns:r="http://schemas.openxmlformats.org/officeDocument/2006/relationships" xmlns:p="http://schemas.openxmlformats.org/presentationml/2006/main">
+  <p:cSld>
+    <p:spTree>
+      <p:nvGrpSpPr>
+        <p:cNvPr id="1" name="">
+          <a:extLst>
+            <a:ext uri="{FF2B5EF4-FFF2-40B4-BE49-F238E27FC236}">
+              <a16:creationId xmlns:a16="http://schemas.microsoft.com/office/drawing/2014/main" id="{EC196FA4-EEFA-2055-12A8-9931C5FA9201}"/>
+            </a:ext>
+          </a:extLst>
+        </p:cNvPr>
+        <p:cNvGrpSpPr/>
+        <p:nvPr/>
+      </p:nvGrpSpPr>
+      <p:grpSpPr>
+        <a:xfrm>
+          <a:off x="0" y="0"/>
+          <a:ext cx="0" cy="0"/>
+          <a:chOff x="0" y="0"/>
+          <a:chExt cx="0" cy="0"/>
+        </a:xfrm>
+      </p:grpSpPr>
+      <p:sp>
+        <p:nvSpPr>
+          <p:cNvPr id="3" name="TextBox 2">
+            <a:extLst>
+              <a:ext uri="{FF2B5EF4-FFF2-40B4-BE49-F238E27FC236}">
+                <a16:creationId xmlns:a16="http://schemas.microsoft.com/office/drawing/2014/main" id="{9DA5E927-2888-B162-6BEF-7B88E6090826}"/>
+              </a:ext>
+            </a:extLst>
+          </p:cNvPr>
+          <p:cNvSpPr txBox="1"/>
+          <p:nvPr/>
+        </p:nvSpPr>
+        <p:spPr>
+          <a:xfrm>
+            <a:off x="217714" y="255046"/>
+            <a:ext cx="11756571" cy="355354"/>
+          </a:xfrm>
+          <a:prstGeom prst="rect">
+            <a:avLst/>
+          </a:prstGeom>
+          <a:noFill/>
+        </p:spPr>
+        <p:txBody>
+          <a:bodyPr wrap="square">
+            <a:spAutoFit/>
+          </a:bodyPr>
+          <a:lstStyle/>
+          <a:p>
+            <a:pPr>
+              <a:lnSpc>
+                <a:spcPct val="150000"/>
+              </a:lnSpc>
+              <a:buNone/>
+            </a:pPr>
+            <a:r>
+              <a:rPr kumimoji="0" lang="en-US" altLang="en-US" sz="1300" b="0" i="0" u="none" strike="noStrike" cap="none" normalizeH="0" baseline="0">
+                <a:ln>
+                  <a:noFill/>
+                </a:ln>
+                <a:solidFill>
+                  <a:schemeClr val="tx1"/>
+                </a:solidFill>
+                <a:effectLst/>
+                <a:latin typeface="Arial" panose="020B0604020202020204" pitchFamily="34" charset="0"/>
+              </a:rPr>
+              <a:t>app\Http\Controllers\PostController.php</a:t>
+            </a:r>
+          </a:p>
+        </p:txBody>
+      </p:sp>
+      <p:pic>
+        <p:nvPicPr>
+          <p:cNvPr id="4" name="Picture 3">
+            <a:extLst>
+              <a:ext uri="{FF2B5EF4-FFF2-40B4-BE49-F238E27FC236}">
+                <a16:creationId xmlns:a16="http://schemas.microsoft.com/office/drawing/2014/main" id="{A2A03683-682D-309C-09FA-954A95319079}"/>
+              </a:ext>
+            </a:extLst>
+          </p:cNvPr>
+          <p:cNvPicPr>
+            <a:picLocks noChangeAspect="1"/>
+          </p:cNvPicPr>
+          <p:nvPr/>
+        </p:nvPicPr>
+        <p:blipFill>
+          <a:blip r:embed="rId2"/>
+          <a:stretch>
+            <a:fillRect/>
+          </a:stretch>
+        </p:blipFill>
+        <p:spPr>
+          <a:xfrm>
+            <a:off x="8653488" y="0"/>
+            <a:ext cx="3538512" cy="5507166"/>
+          </a:xfrm>
+          <a:prstGeom prst="rect">
+            <a:avLst/>
+          </a:prstGeom>
+        </p:spPr>
+      </p:pic>
+      <p:pic>
+        <p:nvPicPr>
+          <p:cNvPr id="6" name="Picture 5">
+            <a:extLst>
+              <a:ext uri="{FF2B5EF4-FFF2-40B4-BE49-F238E27FC236}">
+                <a16:creationId xmlns:a16="http://schemas.microsoft.com/office/drawing/2014/main" id="{49BB70EB-6A17-C6DF-FDFB-C303B4C16AD4}"/>
+              </a:ext>
+            </a:extLst>
+          </p:cNvPr>
+          <p:cNvPicPr>
+            <a:picLocks noChangeAspect="1"/>
+          </p:cNvPicPr>
+          <p:nvPr/>
+        </p:nvPicPr>
+        <p:blipFill>
+          <a:blip r:embed="rId3"/>
+          <a:stretch>
+            <a:fillRect/>
+          </a:stretch>
+        </p:blipFill>
+        <p:spPr>
+          <a:xfrm>
+            <a:off x="8653489" y="5486400"/>
+            <a:ext cx="3538512" cy="1354173"/>
+          </a:xfrm>
+          <a:prstGeom prst="rect">
+            <a:avLst/>
+          </a:prstGeom>
+        </p:spPr>
+      </p:pic>
+    </p:spTree>
+    <p:extLst>
+      <p:ext uri="{BB962C8B-B14F-4D97-AF65-F5344CB8AC3E}">
+        <p14:creationId xmlns:p14="http://schemas.microsoft.com/office/powerpoint/2010/main" val="1171683096"/>
+      </p:ext>
+    </p:extLst>
+  </p:cSld>
+  <p:clrMapOvr>
+    <a:masterClrMapping/>
+  </p:clrMapOvr>
+</p:sld>
+</file>
+
+<file path=ppt/slides/slide12.xml><?xml version="1.0" encoding="utf-8"?>
+<p:sld xmlns:a="http://schemas.openxmlformats.org/drawingml/2006/main" xmlns:r="http://schemas.openxmlformats.org/officeDocument/2006/relationships" xmlns:p="http://schemas.openxmlformats.org/presentationml/2006/main">
+  <p:cSld>
+    <p:spTree>
+      <p:nvGrpSpPr>
+        <p:cNvPr id="1" name="">
+          <a:extLst>
+            <a:ext uri="{FF2B5EF4-FFF2-40B4-BE49-F238E27FC236}">
+              <a16:creationId xmlns:a16="http://schemas.microsoft.com/office/drawing/2014/main" id="{FDC5E56B-7A61-37F9-C702-1F93F6752838}"/>
+            </a:ext>
+          </a:extLst>
+        </p:cNvPr>
+        <p:cNvGrpSpPr/>
+        <p:nvPr/>
+      </p:nvGrpSpPr>
+      <p:grpSpPr>
+        <a:xfrm>
+          <a:off x="0" y="0"/>
+          <a:ext cx="0" cy="0"/>
+          <a:chOff x="0" y="0"/>
+          <a:chExt cx="0" cy="0"/>
+        </a:xfrm>
+      </p:grpSpPr>
+      <p:sp>
+        <p:nvSpPr>
+          <p:cNvPr id="3" name="TextBox 2">
+            <a:extLst>
+              <a:ext uri="{FF2B5EF4-FFF2-40B4-BE49-F238E27FC236}">
+                <a16:creationId xmlns:a16="http://schemas.microsoft.com/office/drawing/2014/main" id="{504F4086-9925-9B26-AB0D-A76679C61F34}"/>
+              </a:ext>
+            </a:extLst>
+          </p:cNvPr>
+          <p:cNvSpPr txBox="1"/>
+          <p:nvPr/>
+        </p:nvSpPr>
+        <p:spPr>
+          <a:xfrm>
+            <a:off x="217714" y="255046"/>
+            <a:ext cx="11756571" cy="355354"/>
+          </a:xfrm>
+          <a:prstGeom prst="rect">
+            <a:avLst/>
+          </a:prstGeom>
+          <a:noFill/>
+        </p:spPr>
+        <p:txBody>
+          <a:bodyPr wrap="square">
+            <a:spAutoFit/>
+          </a:bodyPr>
+          <a:lstStyle/>
+          <a:p>
+            <a:pPr>
+              <a:lnSpc>
+                <a:spcPct val="150000"/>
+              </a:lnSpc>
+              <a:buNone/>
+            </a:pPr>
+            <a:r>
+              <a:rPr kumimoji="0" lang="en-US" altLang="en-US" sz="1300" b="0" i="0" u="none" strike="noStrike" cap="none" normalizeH="0" baseline="0">
+                <a:ln>
+                  <a:noFill/>
+                </a:ln>
+                <a:solidFill>
+                  <a:schemeClr val="tx1"/>
+                </a:solidFill>
+                <a:effectLst/>
+                <a:latin typeface="Arial" panose="020B0604020202020204" pitchFamily="34" charset="0"/>
+              </a:rPr>
+              <a:t>.</a:t>
+            </a:r>
+          </a:p>
+        </p:txBody>
+      </p:sp>
+    </p:spTree>
+    <p:extLst>
+      <p:ext uri="{BB962C8B-B14F-4D97-AF65-F5344CB8AC3E}">
+        <p14:creationId xmlns:p14="http://schemas.microsoft.com/office/powerpoint/2010/main" val="560833438"/>
+      </p:ext>
+    </p:extLst>
+  </p:cSld>
+  <p:clrMapOvr>
+    <a:masterClrMapping/>
+  </p:clrMapOvr>
+</p:sld>
+</file>
+
+<file path=ppt/slides/slide13.xml><?xml version="1.0" encoding="utf-8"?>
+<p:sld xmlns:a="http://schemas.openxmlformats.org/drawingml/2006/main" xmlns:r="http://schemas.openxmlformats.org/officeDocument/2006/relationships" xmlns:p="http://schemas.openxmlformats.org/presentationml/2006/main">
+  <p:cSld>
+    <p:spTree>
+      <p:nvGrpSpPr>
+        <p:cNvPr id="1" name="">
+          <a:extLst>
+            <a:ext uri="{FF2B5EF4-FFF2-40B4-BE49-F238E27FC236}">
+              <a16:creationId xmlns:a16="http://schemas.microsoft.com/office/drawing/2014/main" id="{5721D3A6-2E51-F3BE-626E-E8EFE121DE28}"/>
+            </a:ext>
+          </a:extLst>
+        </p:cNvPr>
+        <p:cNvGrpSpPr/>
+        <p:nvPr/>
+      </p:nvGrpSpPr>
+      <p:grpSpPr>
+        <a:xfrm>
+          <a:off x="0" y="0"/>
+          <a:ext cx="0" cy="0"/>
+          <a:chOff x="0" y="0"/>
+          <a:chExt cx="0" cy="0"/>
+        </a:xfrm>
+      </p:grpSpPr>
+      <p:sp>
+        <p:nvSpPr>
+          <p:cNvPr id="3" name="TextBox 2">
+            <a:extLst>
+              <a:ext uri="{FF2B5EF4-FFF2-40B4-BE49-F238E27FC236}">
+                <a16:creationId xmlns:a16="http://schemas.microsoft.com/office/drawing/2014/main" id="{2193A277-2E0C-B3FE-DB73-D1DE176C89FC}"/>
+              </a:ext>
+            </a:extLst>
+          </p:cNvPr>
+          <p:cNvSpPr txBox="1"/>
+          <p:nvPr/>
+        </p:nvSpPr>
+        <p:spPr>
+          <a:xfrm>
+            <a:off x="217714" y="255046"/>
+            <a:ext cx="11756571" cy="355354"/>
+          </a:xfrm>
+          <a:prstGeom prst="rect">
+            <a:avLst/>
+          </a:prstGeom>
+          <a:noFill/>
+        </p:spPr>
+        <p:txBody>
+          <a:bodyPr wrap="square">
+            <a:spAutoFit/>
+          </a:bodyPr>
+          <a:lstStyle/>
+          <a:p>
+            <a:pPr>
+              <a:lnSpc>
+                <a:spcPct val="150000"/>
+              </a:lnSpc>
+              <a:buNone/>
+            </a:pPr>
+            <a:r>
+              <a:rPr kumimoji="0" lang="en-US" altLang="en-US" sz="1300" b="0" i="0" u="none" strike="noStrike" cap="none" normalizeH="0" baseline="0">
+                <a:ln>
+                  <a:noFill/>
+                </a:ln>
+                <a:solidFill>
+                  <a:schemeClr val="tx1"/>
+                </a:solidFill>
+                <a:effectLst/>
+                <a:latin typeface="Arial" panose="020B0604020202020204" pitchFamily="34" charset="0"/>
+              </a:rPr>
+              <a:t>.</a:t>
+            </a:r>
+          </a:p>
+        </p:txBody>
+      </p:sp>
+    </p:spTree>
+    <p:extLst>
+      <p:ext uri="{BB962C8B-B14F-4D97-AF65-F5344CB8AC3E}">
+        <p14:creationId xmlns:p14="http://schemas.microsoft.com/office/powerpoint/2010/main" val="3984570423"/>
+      </p:ext>
+    </p:extLst>
+  </p:cSld>
+  <p:clrMapOvr>
+    <a:masterClrMapping/>
+  </p:clrMapOvr>
+</p:sld>
+</file>
+
+<file path=ppt/slides/slide14.xml><?xml version="1.0" encoding="utf-8"?>
+<p:sld xmlns:a="http://schemas.openxmlformats.org/drawingml/2006/main" xmlns:r="http://schemas.openxmlformats.org/officeDocument/2006/relationships" xmlns:p="http://schemas.openxmlformats.org/presentationml/2006/main">
+  <p:cSld>
+    <p:spTree>
+      <p:nvGrpSpPr>
+        <p:cNvPr id="1" name="">
+          <a:extLst>
+            <a:ext uri="{FF2B5EF4-FFF2-40B4-BE49-F238E27FC236}">
+              <a16:creationId xmlns:a16="http://schemas.microsoft.com/office/drawing/2014/main" id="{73924239-A004-21B0-5BF9-C31EE44A31CB}"/>
+            </a:ext>
+          </a:extLst>
+        </p:cNvPr>
+        <p:cNvGrpSpPr/>
+        <p:nvPr/>
+      </p:nvGrpSpPr>
+      <p:grpSpPr>
+        <a:xfrm>
+          <a:off x="0" y="0"/>
+          <a:ext cx="0" cy="0"/>
+          <a:chOff x="0" y="0"/>
+          <a:chExt cx="0" cy="0"/>
+        </a:xfrm>
+      </p:grpSpPr>
+      <p:sp>
+        <p:nvSpPr>
+          <p:cNvPr id="3" name="TextBox 2">
+            <a:extLst>
+              <a:ext uri="{FF2B5EF4-FFF2-40B4-BE49-F238E27FC236}">
+                <a16:creationId xmlns:a16="http://schemas.microsoft.com/office/drawing/2014/main" id="{112C22A5-0073-463A-98F6-049D4F8DF99B}"/>
+              </a:ext>
+            </a:extLst>
+          </p:cNvPr>
+          <p:cNvSpPr txBox="1"/>
+          <p:nvPr/>
+        </p:nvSpPr>
+        <p:spPr>
+          <a:xfrm>
+            <a:off x="217714" y="255046"/>
+            <a:ext cx="11756571" cy="355354"/>
+          </a:xfrm>
+          <a:prstGeom prst="rect">
+            <a:avLst/>
+          </a:prstGeom>
+          <a:noFill/>
+        </p:spPr>
+        <p:txBody>
+          <a:bodyPr wrap="square">
+            <a:spAutoFit/>
+          </a:bodyPr>
+          <a:lstStyle/>
+          <a:p>
+            <a:pPr>
+              <a:lnSpc>
+                <a:spcPct val="150000"/>
+              </a:lnSpc>
+              <a:buNone/>
+            </a:pPr>
+            <a:r>
+              <a:rPr kumimoji="0" lang="en-US" altLang="en-US" sz="1300" b="0" i="0" u="none" strike="noStrike" cap="none" normalizeH="0" baseline="0">
+                <a:ln>
+                  <a:noFill/>
+                </a:ln>
+                <a:solidFill>
+                  <a:schemeClr val="tx1"/>
+                </a:solidFill>
+                <a:effectLst/>
+                <a:latin typeface="Arial" panose="020B0604020202020204" pitchFamily="34" charset="0"/>
+              </a:rPr>
+              <a:t>.</a:t>
+            </a:r>
+          </a:p>
+        </p:txBody>
+      </p:sp>
+    </p:spTree>
+    <p:extLst>
+      <p:ext uri="{BB962C8B-B14F-4D97-AF65-F5344CB8AC3E}">
+        <p14:creationId xmlns:p14="http://schemas.microsoft.com/office/powerpoint/2010/main" val="1761892857"/>
       </p:ext>
     </p:extLst>
   </p:cSld>
@@ -3435,7 +4023,7 @@
         <p:spPr>
           <a:xfrm>
             <a:off x="217714" y="255046"/>
-            <a:ext cx="11756571" cy="355354"/>
+            <a:ext cx="4825341" cy="1255600"/>
           </a:xfrm>
           <a:prstGeom prst="rect">
             <a:avLst/>
@@ -3455,21 +4043,134 @@
               <a:buNone/>
             </a:pPr>
             <a:r>
-              <a:rPr kumimoji="0" lang="en-US" altLang="en-US" sz="1300" b="0" i="0" u="none" strike="noStrike" cap="none" normalizeH="0" baseline="0">
-                <a:ln>
-                  <a:noFill/>
-                </a:ln>
-                <a:solidFill>
-                  <a:schemeClr val="tx1"/>
-                </a:solidFill>
-                <a:effectLst/>
-                <a:latin typeface="Arial" panose="020B0604020202020204" pitchFamily="34" charset="0"/>
-              </a:rPr>
-              <a:t>.</a:t>
-            </a:r>
-          </a:p>
-        </p:txBody>
-      </p:sp>
+              <a:rPr lang="az-Latn-AZ" altLang="en-US" sz="1300">
+                <a:latin typeface="Arial" panose="020B0604020202020204" pitchFamily="34" charset="0"/>
+              </a:rPr>
+              <a:t>Sütunun adı `</a:t>
+            </a:r>
+            <a:r>
+              <a:rPr lang="az-Latn-AZ" altLang="en-US" sz="1300" b="1">
+                <a:latin typeface="Arial" panose="020B0604020202020204" pitchFamily="34" charset="0"/>
+              </a:rPr>
+              <a:t>is_admin</a:t>
+            </a:r>
+            <a:r>
+              <a:rPr lang="az-Latn-AZ" altLang="en-US" sz="1300">
+                <a:latin typeface="Arial" panose="020B0604020202020204" pitchFamily="34" charset="0"/>
+              </a:rPr>
+              <a:t>` -dir.</a:t>
+            </a:r>
+          </a:p>
+          <a:p>
+            <a:pPr>
+              <a:lnSpc>
+                <a:spcPct val="150000"/>
+              </a:lnSpc>
+              <a:buNone/>
+            </a:pPr>
+            <a:endParaRPr kumimoji="0" lang="az-Latn-AZ" altLang="en-US" sz="1300" b="0" i="0" u="none" strike="noStrike" cap="none" normalizeH="0" baseline="0">
+              <a:ln>
+                <a:noFill/>
+              </a:ln>
+              <a:solidFill>
+                <a:schemeClr val="tx1"/>
+              </a:solidFill>
+              <a:effectLst/>
+              <a:latin typeface="Arial" panose="020B0604020202020204" pitchFamily="34" charset="0"/>
+            </a:endParaRPr>
+          </a:p>
+          <a:p>
+            <a:pPr>
+              <a:lnSpc>
+                <a:spcPct val="150000"/>
+              </a:lnSpc>
+              <a:buNone/>
+            </a:pPr>
+            <a:r>
+              <a:rPr lang="az-Latn-AZ" altLang="en-US" sz="1300">
+                <a:latin typeface="Arial" panose="020B0604020202020204" pitchFamily="34" charset="0"/>
+              </a:rPr>
+              <a:t>Sonra cədvəli </a:t>
+            </a:r>
+            <a:r>
+              <a:rPr lang="az-Latn-AZ" altLang="en-US" sz="1300" b="1">
+                <a:latin typeface="Arial" panose="020B0604020202020204" pitchFamily="34" charset="0"/>
+              </a:rPr>
+              <a:t>MİGRATE</a:t>
+            </a:r>
+            <a:r>
+              <a:rPr lang="az-Latn-AZ" altLang="en-US" sz="1300">
+                <a:latin typeface="Arial" panose="020B0604020202020204" pitchFamily="34" charset="0"/>
+              </a:rPr>
+              <a:t> edirik ki, həmin </a:t>
+            </a:r>
+            <a:r>
+              <a:rPr lang="az-Latn-AZ" altLang="en-US" sz="1300" b="1">
+                <a:latin typeface="Arial" panose="020B0604020202020204" pitchFamily="34" charset="0"/>
+              </a:rPr>
+              <a:t>sütun</a:t>
+            </a:r>
+            <a:r>
+              <a:rPr lang="az-Latn-AZ" altLang="en-US" sz="1300">
+                <a:latin typeface="Arial" panose="020B0604020202020204" pitchFamily="34" charset="0"/>
+              </a:rPr>
+              <a:t> bu </a:t>
+            </a:r>
+            <a:r>
+              <a:rPr lang="az-Latn-AZ" altLang="en-US" sz="1300" b="1">
+                <a:latin typeface="Arial" panose="020B0604020202020204" pitchFamily="34" charset="0"/>
+              </a:rPr>
+              <a:t>cədvələ</a:t>
+            </a:r>
+            <a:r>
+              <a:rPr lang="az-Latn-AZ" altLang="en-US" sz="1300">
+                <a:latin typeface="Arial" panose="020B0604020202020204" pitchFamily="34" charset="0"/>
+              </a:rPr>
+              <a:t> yazılsın.</a:t>
+            </a:r>
+            <a:endParaRPr kumimoji="0" lang="en-US" altLang="en-US" sz="1300" b="0" i="0" u="none" strike="noStrike" cap="none" normalizeH="0" baseline="0">
+              <a:ln>
+                <a:noFill/>
+              </a:ln>
+              <a:solidFill>
+                <a:schemeClr val="tx1"/>
+              </a:solidFill>
+              <a:effectLst/>
+              <a:latin typeface="Arial" panose="020B0604020202020204" pitchFamily="34" charset="0"/>
+            </a:endParaRPr>
+          </a:p>
+        </p:txBody>
+      </p:sp>
+      <p:pic>
+        <p:nvPicPr>
+          <p:cNvPr id="4" name="Picture 3">
+            <a:extLst>
+              <a:ext uri="{FF2B5EF4-FFF2-40B4-BE49-F238E27FC236}">
+                <a16:creationId xmlns:a16="http://schemas.microsoft.com/office/drawing/2014/main" id="{7446F15F-9AD5-65BF-6667-2909BE27342E}"/>
+              </a:ext>
+            </a:extLst>
+          </p:cNvPr>
+          <p:cNvPicPr>
+            <a:picLocks noChangeAspect="1"/>
+          </p:cNvPicPr>
+          <p:nvPr/>
+        </p:nvPicPr>
+        <p:blipFill>
+          <a:blip r:embed="rId2"/>
+          <a:stretch>
+            <a:fillRect/>
+          </a:stretch>
+        </p:blipFill>
+        <p:spPr>
+          <a:xfrm>
+            <a:off x="5292437" y="0"/>
+            <a:ext cx="6899563" cy="6858000"/>
+          </a:xfrm>
+          <a:prstGeom prst="rect">
+            <a:avLst/>
+          </a:prstGeom>
+        </p:spPr>
+      </p:pic>
     </p:spTree>
     <p:extLst>
       <p:ext uri="{BB962C8B-B14F-4D97-AF65-F5344CB8AC3E}">
@@ -3541,6 +4242,479 @@
               <a:buNone/>
             </a:pPr>
             <a:r>
+              <a:rPr lang="az-Latn-AZ" altLang="en-US" sz="1300" b="1">
+                <a:latin typeface="Arial" panose="020B0604020202020204" pitchFamily="34" charset="0"/>
+              </a:rPr>
+              <a:t>Default</a:t>
+            </a:r>
+            <a:r>
+              <a:rPr lang="az-Latn-AZ" altLang="en-US" sz="1300">
+                <a:latin typeface="Arial" panose="020B0604020202020204" pitchFamily="34" charset="0"/>
+              </a:rPr>
+              <a:t> olaraq </a:t>
+            </a:r>
+            <a:r>
+              <a:rPr lang="az-Latn-AZ" altLang="en-US" sz="1300" b="1">
+                <a:latin typeface="Arial" panose="020B0604020202020204" pitchFamily="34" charset="0"/>
+              </a:rPr>
+              <a:t>is_admin </a:t>
+            </a:r>
+            <a:r>
+              <a:rPr lang="az-Latn-AZ" altLang="en-US" sz="1300">
+                <a:latin typeface="Arial" panose="020B0604020202020204" pitchFamily="34" charset="0"/>
+              </a:rPr>
+              <a:t>sütunun dəyəri </a:t>
+            </a:r>
+            <a:r>
+              <a:rPr lang="az-Latn-AZ" altLang="en-US" sz="1300" b="1">
+                <a:latin typeface="Arial" panose="020B0604020202020204" pitchFamily="34" charset="0"/>
+              </a:rPr>
+              <a:t>0</a:t>
+            </a:r>
+            <a:r>
+              <a:rPr lang="az-Latn-AZ" altLang="en-US" sz="1300">
+                <a:latin typeface="Arial" panose="020B0604020202020204" pitchFamily="34" charset="0"/>
+              </a:rPr>
+              <a:t> -dır.</a:t>
+            </a:r>
+            <a:endParaRPr kumimoji="0" lang="en-US" altLang="en-US" sz="1300" b="0" i="0" u="none" strike="noStrike" cap="none" normalizeH="0" baseline="0">
+              <a:ln>
+                <a:noFill/>
+              </a:ln>
+              <a:solidFill>
+                <a:schemeClr val="tx1"/>
+              </a:solidFill>
+              <a:effectLst/>
+              <a:latin typeface="Arial" panose="020B0604020202020204" pitchFamily="34" charset="0"/>
+            </a:endParaRPr>
+          </a:p>
+        </p:txBody>
+      </p:sp>
+      <p:pic>
+        <p:nvPicPr>
+          <p:cNvPr id="4" name="Picture 3">
+            <a:extLst>
+              <a:ext uri="{FF2B5EF4-FFF2-40B4-BE49-F238E27FC236}">
+                <a16:creationId xmlns:a16="http://schemas.microsoft.com/office/drawing/2014/main" id="{F819DFD0-968D-62B0-9BE4-06CF56E91F9A}"/>
+              </a:ext>
+            </a:extLst>
+          </p:cNvPr>
+          <p:cNvPicPr>
+            <a:picLocks noChangeAspect="1"/>
+          </p:cNvPicPr>
+          <p:nvPr/>
+        </p:nvPicPr>
+        <p:blipFill>
+          <a:blip r:embed="rId2"/>
+          <a:stretch>
+            <a:fillRect/>
+          </a:stretch>
+        </p:blipFill>
+        <p:spPr>
+          <a:xfrm>
+            <a:off x="0" y="3805162"/>
+            <a:ext cx="12192000" cy="2979168"/>
+          </a:xfrm>
+          <a:prstGeom prst="rect">
+            <a:avLst/>
+          </a:prstGeom>
+          <a:ln w="38100" cap="sq">
+            <a:solidFill>
+              <a:srgbClr val="000000"/>
+            </a:solidFill>
+            <a:prstDash val="solid"/>
+            <a:miter lim="800000"/>
+          </a:ln>
+          <a:effectLst>
+            <a:outerShdw blurRad="50800" dist="38100" dir="2700000" algn="tl" rotWithShape="0">
+              <a:srgbClr val="000000">
+                <a:alpha val="43000"/>
+              </a:srgbClr>
+            </a:outerShdw>
+          </a:effectLst>
+        </p:spPr>
+      </p:pic>
+    </p:spTree>
+    <p:extLst>
+      <p:ext uri="{BB962C8B-B14F-4D97-AF65-F5344CB8AC3E}">
+        <p14:creationId xmlns:p14="http://schemas.microsoft.com/office/powerpoint/2010/main" val="3095838342"/>
+      </p:ext>
+    </p:extLst>
+  </p:cSld>
+  <p:clrMapOvr>
+    <a:masterClrMapping/>
+  </p:clrMapOvr>
+</p:sld>
+</file>
+
+<file path=ppt/slides/slide4.xml><?xml version="1.0" encoding="utf-8"?>
+<p:sld xmlns:a="http://schemas.openxmlformats.org/drawingml/2006/main" xmlns:r="http://schemas.openxmlformats.org/officeDocument/2006/relationships" xmlns:p="http://schemas.openxmlformats.org/presentationml/2006/main">
+  <p:cSld>
+    <p:spTree>
+      <p:nvGrpSpPr>
+        <p:cNvPr id="1" name="">
+          <a:extLst>
+            <a:ext uri="{FF2B5EF4-FFF2-40B4-BE49-F238E27FC236}">
+              <a16:creationId xmlns:a16="http://schemas.microsoft.com/office/drawing/2014/main" id="{BE8D6A16-C7E6-845B-7059-4CC27B607056}"/>
+            </a:ext>
+          </a:extLst>
+        </p:cNvPr>
+        <p:cNvGrpSpPr/>
+        <p:nvPr/>
+      </p:nvGrpSpPr>
+      <p:grpSpPr>
+        <a:xfrm>
+          <a:off x="0" y="0"/>
+          <a:ext cx="0" cy="0"/>
+          <a:chOff x="0" y="0"/>
+          <a:chExt cx="0" cy="0"/>
+        </a:xfrm>
+      </p:grpSpPr>
+      <p:sp>
+        <p:nvSpPr>
+          <p:cNvPr id="3" name="TextBox 2">
+            <a:extLst>
+              <a:ext uri="{FF2B5EF4-FFF2-40B4-BE49-F238E27FC236}">
+                <a16:creationId xmlns:a16="http://schemas.microsoft.com/office/drawing/2014/main" id="{94A97E68-60F9-6BC3-A23B-A0E1FAA34597}"/>
+              </a:ext>
+            </a:extLst>
+          </p:cNvPr>
+          <p:cNvSpPr txBox="1"/>
+          <p:nvPr/>
+        </p:nvSpPr>
+        <p:spPr>
+          <a:xfrm>
+            <a:off x="217714" y="255046"/>
+            <a:ext cx="11756571" cy="1255600"/>
+          </a:xfrm>
+          <a:prstGeom prst="rect">
+            <a:avLst/>
+          </a:prstGeom>
+          <a:noFill/>
+        </p:spPr>
+        <p:txBody>
+          <a:bodyPr wrap="square">
+            <a:spAutoFit/>
+          </a:bodyPr>
+          <a:lstStyle/>
+          <a:p>
+            <a:pPr>
+              <a:lnSpc>
+                <a:spcPct val="150000"/>
+              </a:lnSpc>
+              <a:buNone/>
+            </a:pPr>
+            <a:r>
+              <a:rPr lang="en-US" altLang="en-US" sz="1300">
+                <a:latin typeface="Arial" panose="020B0604020202020204" pitchFamily="34" charset="0"/>
+              </a:rPr>
+              <a:t>Sonra </a:t>
+            </a:r>
+            <a:r>
+              <a:rPr lang="az-Latn-AZ" altLang="en-US" sz="1300">
+                <a:latin typeface="Arial" panose="020B0604020202020204" pitchFamily="34" charset="0"/>
+              </a:rPr>
+              <a:t>isə, `</a:t>
+            </a:r>
+            <a:r>
+              <a:rPr lang="az-Latn-AZ" altLang="en-US" sz="1300" b="1" i="1">
+                <a:latin typeface="Arial" panose="020B0604020202020204" pitchFamily="34" charset="0"/>
+              </a:rPr>
+              <a:t>PostController</a:t>
+            </a:r>
+            <a:r>
+              <a:rPr lang="az-Latn-AZ" altLang="en-US" sz="1300">
+                <a:latin typeface="Arial" panose="020B0604020202020204" pitchFamily="34" charset="0"/>
+              </a:rPr>
+              <a:t>` -dəki </a:t>
+            </a:r>
+            <a:r>
+              <a:rPr lang="en-US" altLang="en-US" sz="1300">
+                <a:latin typeface="Arial" panose="020B0604020202020204" pitchFamily="34" charset="0"/>
+              </a:rPr>
+              <a:t>middleware </a:t>
+            </a:r>
+            <a:r>
+              <a:rPr lang="az-Latn-AZ" altLang="en-US" sz="1300">
+                <a:latin typeface="Arial" panose="020B0604020202020204" pitchFamily="34" charset="0"/>
+              </a:rPr>
+              <a:t>üçün istifadə edilən</a:t>
+            </a:r>
+          </a:p>
+          <a:p>
+            <a:pPr>
+              <a:lnSpc>
+                <a:spcPct val="150000"/>
+              </a:lnSpc>
+              <a:buNone/>
+            </a:pPr>
+            <a:r>
+              <a:rPr kumimoji="0" lang="en-US" altLang="en-US" sz="1300" b="1" i="0" u="none" strike="noStrike" cap="none" normalizeH="0" baseline="0">
+                <a:ln>
+                  <a:noFill/>
+                </a:ln>
+                <a:solidFill>
+                  <a:schemeClr val="tx1"/>
+                </a:solidFill>
+                <a:effectLst/>
+                <a:latin typeface="Arial" panose="020B0604020202020204" pitchFamily="34" charset="0"/>
+              </a:rPr>
+              <a:t>__construct() </a:t>
+            </a:r>
+            <a:r>
+              <a:rPr kumimoji="0" lang="az-Latn-AZ" altLang="en-US" sz="1300" b="0" i="0" u="none" strike="noStrike" cap="none" normalizeH="0" baseline="0">
+                <a:ln>
+                  <a:noFill/>
+                </a:ln>
+                <a:solidFill>
+                  <a:schemeClr val="tx1"/>
+                </a:solidFill>
+                <a:effectLst/>
+                <a:latin typeface="Arial" panose="020B0604020202020204" pitchFamily="34" charset="0"/>
+              </a:rPr>
+              <a:t>funksiyasını kommentə alırıq ki, digər bütün </a:t>
+            </a:r>
+            <a:endParaRPr lang="az-Latn-AZ" altLang="en-US" sz="1300">
+              <a:latin typeface="Arial" panose="020B0604020202020204" pitchFamily="34" charset="0"/>
+            </a:endParaRPr>
+          </a:p>
+          <a:p>
+            <a:pPr>
+              <a:lnSpc>
+                <a:spcPct val="150000"/>
+              </a:lnSpc>
+              <a:buNone/>
+            </a:pPr>
+            <a:r>
+              <a:rPr kumimoji="0" lang="az-Latn-AZ" altLang="en-US" sz="1300" b="0" i="0" u="none" strike="noStrike" cap="none" normalizeH="0" baseline="0">
+                <a:ln>
+                  <a:noFill/>
+                </a:ln>
+                <a:solidFill>
+                  <a:schemeClr val="tx1"/>
+                </a:solidFill>
+                <a:effectLst/>
+                <a:latin typeface="Arial" panose="020B0604020202020204" pitchFamily="34" charset="0"/>
+              </a:rPr>
+              <a:t>şablonlar problemsiz açılsın. Əks halda aşağıdakı kimi `</a:t>
+            </a:r>
+            <a:r>
+              <a:rPr kumimoji="0" lang="az-Latn-AZ" altLang="en-US" sz="1300" b="1" i="0" u="none" strike="noStrike" cap="none" normalizeH="0" baseline="0">
+                <a:ln>
+                  <a:noFill/>
+                </a:ln>
+                <a:solidFill>
+                  <a:schemeClr val="tx1"/>
+                </a:solidFill>
+                <a:effectLst/>
+                <a:latin typeface="Arial" panose="020B0604020202020204" pitchFamily="34" charset="0"/>
+              </a:rPr>
+              <a:t>unavailable</a:t>
+            </a:r>
+            <a:r>
+              <a:rPr kumimoji="0" lang="az-Latn-AZ" altLang="en-US" sz="1300" b="0" i="0" u="none" strike="noStrike" cap="none" normalizeH="0" baseline="0">
+                <a:ln>
+                  <a:noFill/>
+                </a:ln>
+                <a:solidFill>
+                  <a:schemeClr val="tx1"/>
+                </a:solidFill>
+                <a:effectLst/>
+                <a:latin typeface="Arial" panose="020B0604020202020204" pitchFamily="34" charset="0"/>
+              </a:rPr>
+              <a:t>` </a:t>
+            </a:r>
+          </a:p>
+          <a:p>
+            <a:pPr>
+              <a:lnSpc>
+                <a:spcPct val="150000"/>
+              </a:lnSpc>
+              <a:buNone/>
+            </a:pPr>
+            <a:r>
+              <a:rPr lang="az-Latn-AZ" altLang="en-US" sz="1300">
+                <a:latin typeface="Arial" panose="020B0604020202020204" pitchFamily="34" charset="0"/>
+              </a:rPr>
+              <a:t>şablonu ilə üzləşərdik.</a:t>
+            </a:r>
+            <a:endParaRPr kumimoji="0" lang="en-US" altLang="en-US" sz="1300" b="0" i="0" u="none" strike="noStrike" cap="none" normalizeH="0" baseline="0">
+              <a:ln>
+                <a:noFill/>
+              </a:ln>
+              <a:solidFill>
+                <a:schemeClr val="tx1"/>
+              </a:solidFill>
+              <a:effectLst/>
+              <a:latin typeface="Arial" panose="020B0604020202020204" pitchFamily="34" charset="0"/>
+            </a:endParaRPr>
+          </a:p>
+        </p:txBody>
+      </p:sp>
+      <p:pic>
+        <p:nvPicPr>
+          <p:cNvPr id="6" name="Picture 5">
+            <a:extLst>
+              <a:ext uri="{FF2B5EF4-FFF2-40B4-BE49-F238E27FC236}">
+                <a16:creationId xmlns:a16="http://schemas.microsoft.com/office/drawing/2014/main" id="{61B3A32A-A699-394E-32D2-202CC2877BA3}"/>
+              </a:ext>
+            </a:extLst>
+          </p:cNvPr>
+          <p:cNvPicPr>
+            <a:picLocks noChangeAspect="1"/>
+          </p:cNvPicPr>
+          <p:nvPr/>
+        </p:nvPicPr>
+        <p:blipFill>
+          <a:blip r:embed="rId2"/>
+          <a:stretch>
+            <a:fillRect/>
+          </a:stretch>
+        </p:blipFill>
+        <p:spPr>
+          <a:xfrm>
+            <a:off x="6123728" y="0"/>
+            <a:ext cx="6068272" cy="3924848"/>
+          </a:xfrm>
+          <a:prstGeom prst="rect">
+            <a:avLst/>
+          </a:prstGeom>
+        </p:spPr>
+      </p:pic>
+      <p:pic>
+        <p:nvPicPr>
+          <p:cNvPr id="8" name="Picture 7">
+            <a:extLst>
+              <a:ext uri="{FF2B5EF4-FFF2-40B4-BE49-F238E27FC236}">
+                <a16:creationId xmlns:a16="http://schemas.microsoft.com/office/drawing/2014/main" id="{65525EA5-DA8C-335E-9961-489E77247442}"/>
+              </a:ext>
+            </a:extLst>
+          </p:cNvPr>
+          <p:cNvPicPr>
+            <a:picLocks noChangeAspect="1"/>
+          </p:cNvPicPr>
+          <p:nvPr/>
+        </p:nvPicPr>
+        <p:blipFill>
+          <a:blip r:embed="rId3"/>
+          <a:stretch>
+            <a:fillRect/>
+          </a:stretch>
+        </p:blipFill>
+        <p:spPr>
+          <a:xfrm>
+            <a:off x="67705" y="4629143"/>
+            <a:ext cx="7992590" cy="2162477"/>
+          </a:xfrm>
+          <a:prstGeom prst="rect">
+            <a:avLst/>
+          </a:prstGeom>
+          <a:ln w="38100" cap="sq">
+            <a:solidFill>
+              <a:srgbClr val="000000"/>
+            </a:solidFill>
+            <a:prstDash val="solid"/>
+            <a:miter lim="800000"/>
+          </a:ln>
+          <a:effectLst>
+            <a:outerShdw blurRad="50800" dist="38100" dir="2700000" algn="tl" rotWithShape="0">
+              <a:srgbClr val="000000">
+                <a:alpha val="43000"/>
+              </a:srgbClr>
+            </a:outerShdw>
+          </a:effectLst>
+        </p:spPr>
+      </p:pic>
+    </p:spTree>
+    <p:extLst>
+      <p:ext uri="{BB962C8B-B14F-4D97-AF65-F5344CB8AC3E}">
+        <p14:creationId xmlns:p14="http://schemas.microsoft.com/office/powerpoint/2010/main" val="538109916"/>
+      </p:ext>
+    </p:extLst>
+  </p:cSld>
+  <p:clrMapOvr>
+    <a:masterClrMapping/>
+  </p:clrMapOvr>
+</p:sld>
+</file>
+
+<file path=ppt/slides/slide5.xml><?xml version="1.0" encoding="utf-8"?>
+<p:sld xmlns:a="http://schemas.openxmlformats.org/drawingml/2006/main" xmlns:r="http://schemas.openxmlformats.org/officeDocument/2006/relationships" xmlns:p="http://schemas.openxmlformats.org/presentationml/2006/main">
+  <p:cSld>
+    <p:spTree>
+      <p:nvGrpSpPr>
+        <p:cNvPr id="1" name="">
+          <a:extLst>
+            <a:ext uri="{FF2B5EF4-FFF2-40B4-BE49-F238E27FC236}">
+              <a16:creationId xmlns:a16="http://schemas.microsoft.com/office/drawing/2014/main" id="{83F54131-212D-5763-8501-CA7F74C052F8}"/>
+            </a:ext>
+          </a:extLst>
+        </p:cNvPr>
+        <p:cNvGrpSpPr/>
+        <p:nvPr/>
+      </p:nvGrpSpPr>
+      <p:grpSpPr>
+        <a:xfrm>
+          <a:off x="0" y="0"/>
+          <a:ext cx="0" cy="0"/>
+          <a:chOff x="0" y="0"/>
+          <a:chExt cx="0" cy="0"/>
+        </a:xfrm>
+      </p:grpSpPr>
+      <p:sp>
+        <p:nvSpPr>
+          <p:cNvPr id="3" name="TextBox 2">
+            <a:extLst>
+              <a:ext uri="{FF2B5EF4-FFF2-40B4-BE49-F238E27FC236}">
+                <a16:creationId xmlns:a16="http://schemas.microsoft.com/office/drawing/2014/main" id="{3849EB86-98D4-638C-19CC-8BA9766A5BBD}"/>
+              </a:ext>
+            </a:extLst>
+          </p:cNvPr>
+          <p:cNvSpPr txBox="1"/>
+          <p:nvPr/>
+        </p:nvSpPr>
+        <p:spPr>
+          <a:xfrm>
+            <a:off x="217714" y="255046"/>
+            <a:ext cx="11756571" cy="6287747"/>
+          </a:xfrm>
+          <a:prstGeom prst="rect">
+            <a:avLst/>
+          </a:prstGeom>
+          <a:noFill/>
+        </p:spPr>
+        <p:txBody>
+          <a:bodyPr wrap="square">
+            <a:spAutoFit/>
+          </a:bodyPr>
+          <a:lstStyle/>
+          <a:p>
+            <a:pPr>
+              <a:lnSpc>
+                <a:spcPct val="150000"/>
+              </a:lnSpc>
+              <a:buNone/>
+            </a:pPr>
+            <a:r>
+              <a:rPr lang="az-Latn-AZ" altLang="en-US" sz="1300">
+                <a:latin typeface="Arial" panose="020B0604020202020204" pitchFamily="34" charset="0"/>
+              </a:rPr>
+              <a:t>Artıq </a:t>
+            </a:r>
+            <a:r>
+              <a:rPr kumimoji="0" lang="en-US" altLang="en-US" sz="1300" b="1" i="0" u="none" strike="noStrike" cap="none" normalizeH="0" baseline="0">
+                <a:ln>
+                  <a:noFill/>
+                </a:ln>
+                <a:solidFill>
+                  <a:schemeClr val="tx1"/>
+                </a:solidFill>
+                <a:effectLst/>
+                <a:latin typeface="Arial" panose="020B0604020202020204" pitchFamily="34" charset="0"/>
+              </a:rPr>
+              <a:t>Laravel Gate əsaslı Authorization </a:t>
+            </a:r>
+            <a:r>
               <a:rPr kumimoji="0" lang="en-US" altLang="en-US" sz="1300" b="0" i="0" u="none" strike="noStrike" cap="none" normalizeH="0" baseline="0">
                 <a:ln>
                   <a:noFill/>
@@ -3551,15 +4725,2659 @@
                 <a:effectLst/>
                 <a:latin typeface="Arial" panose="020B0604020202020204" pitchFamily="34" charset="0"/>
               </a:rPr>
+              <a:t>mövzusunu</a:t>
+            </a:r>
+            <a:r>
+              <a:rPr kumimoji="0" lang="az-Latn-AZ" altLang="en-US" sz="1300" b="0" i="0" u="none" strike="noStrike" cap="none" normalizeH="0" baseline="0">
+                <a:ln>
+                  <a:noFill/>
+                </a:ln>
+                <a:solidFill>
+                  <a:schemeClr val="tx1"/>
+                </a:solidFill>
+                <a:effectLst/>
+                <a:latin typeface="Arial" panose="020B0604020202020204" pitchFamily="34" charset="0"/>
+              </a:rPr>
+              <a:t>n izahına keçə bilərik. </a:t>
+            </a:r>
+          </a:p>
+          <a:p>
+            <a:pPr>
+              <a:lnSpc>
+                <a:spcPct val="150000"/>
+              </a:lnSpc>
+              <a:buNone/>
+            </a:pPr>
+            <a:endParaRPr lang="az-Latn-AZ" altLang="en-US" sz="1300">
+              <a:latin typeface="Arial" panose="020B0604020202020204" pitchFamily="34" charset="0"/>
+            </a:endParaRPr>
+          </a:p>
+          <a:p>
+            <a:pPr>
+              <a:lnSpc>
+                <a:spcPct val="150000"/>
+              </a:lnSpc>
+              <a:buNone/>
+            </a:pPr>
+            <a:r>
+              <a:rPr kumimoji="0" lang="en-US" altLang="en-US" b="1" i="0" u="none" strike="noStrike" cap="none" normalizeH="0" baseline="0">
+                <a:ln>
+                  <a:noFill/>
+                </a:ln>
+                <a:solidFill>
+                  <a:srgbClr val="FF0000"/>
+                </a:solidFill>
+                <a:effectLst/>
+                <a:latin typeface="Arial" panose="020B0604020202020204" pitchFamily="34" charset="0"/>
+              </a:rPr>
+              <a:t>Dərs: Laravel Gate ilə Authorization – (Giriş Səviyyəsində İcazələrin İdarəsi)</a:t>
+            </a:r>
+            <a:endParaRPr kumimoji="0" lang="az-Latn-AZ" altLang="en-US" b="1" i="0" u="none" strike="noStrike" cap="none" normalizeH="0" baseline="0">
+              <a:ln>
+                <a:noFill/>
+              </a:ln>
+              <a:solidFill>
+                <a:srgbClr val="FF0000"/>
+              </a:solidFill>
+              <a:effectLst/>
+              <a:latin typeface="Arial" panose="020B0604020202020204" pitchFamily="34" charset="0"/>
+            </a:endParaRPr>
+          </a:p>
+          <a:p>
+            <a:pPr>
+              <a:lnSpc>
+                <a:spcPct val="150000"/>
+              </a:lnSpc>
+              <a:buNone/>
+            </a:pPr>
+            <a:endParaRPr lang="az-Latn-AZ" altLang="en-US" b="1">
+              <a:solidFill>
+                <a:srgbClr val="FF0000"/>
+              </a:solidFill>
+              <a:latin typeface="Arial" panose="020B0604020202020204" pitchFamily="34" charset="0"/>
+            </a:endParaRPr>
+          </a:p>
+          <a:p>
+            <a:pPr>
+              <a:lnSpc>
+                <a:spcPct val="150000"/>
+              </a:lnSpc>
+              <a:buNone/>
+            </a:pPr>
+            <a:endParaRPr kumimoji="0" lang="az-Latn-AZ" altLang="en-US" sz="1300" b="0" i="0" u="none" strike="noStrike" cap="none" normalizeH="0" baseline="0">
+              <a:ln>
+                <a:noFill/>
+              </a:ln>
+              <a:solidFill>
+                <a:schemeClr val="tx1"/>
+              </a:solidFill>
+              <a:effectLst/>
+              <a:latin typeface="Arial" panose="020B0604020202020204" pitchFamily="34" charset="0"/>
+            </a:endParaRPr>
+          </a:p>
+          <a:p>
+            <a:pPr>
+              <a:lnSpc>
+                <a:spcPct val="150000"/>
+              </a:lnSpc>
+              <a:buNone/>
+            </a:pPr>
+            <a:r>
+              <a:rPr kumimoji="0" lang="en-US" altLang="en-US" sz="1300" b="1" i="0" u="none" strike="noStrike" cap="none" normalizeH="0" baseline="0">
+                <a:ln>
+                  <a:noFill/>
+                </a:ln>
+                <a:solidFill>
+                  <a:schemeClr val="tx1"/>
+                </a:solidFill>
+                <a:effectLst/>
+                <a:latin typeface="Arial" panose="020B0604020202020204" pitchFamily="34" charset="0"/>
+              </a:rPr>
+              <a:t>Məqsəd</a:t>
+            </a:r>
+            <a:r>
+              <a:rPr kumimoji="0" lang="en-US" altLang="en-US" sz="1300" b="0" i="0" u="none" strike="noStrike" cap="none" normalizeH="0" baseline="0">
+                <a:ln>
+                  <a:noFill/>
+                </a:ln>
+                <a:solidFill>
+                  <a:schemeClr val="tx1"/>
+                </a:solidFill>
+                <a:effectLst/>
+                <a:latin typeface="Arial" panose="020B0604020202020204" pitchFamily="34" charset="0"/>
+              </a:rPr>
+              <a:t>:</a:t>
+            </a:r>
+          </a:p>
+          <a:p>
+            <a:pPr marL="742950" lvl="1" indent="-285750">
+              <a:lnSpc>
+                <a:spcPct val="150000"/>
+              </a:lnSpc>
+              <a:buFont typeface="Arial" panose="020B0604020202020204" pitchFamily="34" charset="0"/>
+              <a:buChar char="•"/>
+            </a:pPr>
+            <a:r>
+              <a:rPr kumimoji="0" lang="en-US" altLang="en-US" sz="1300" b="0" i="0" u="none" strike="noStrike" cap="none" normalizeH="0" baseline="0">
+                <a:ln>
+                  <a:noFill/>
+                </a:ln>
+                <a:solidFill>
+                  <a:schemeClr val="tx1"/>
+                </a:solidFill>
+                <a:effectLst/>
+                <a:latin typeface="Arial" panose="020B0604020202020204" pitchFamily="34" charset="0"/>
+              </a:rPr>
+              <a:t>Bu dərsdə öyrənəcəyik:</a:t>
+            </a:r>
+          </a:p>
+          <a:p>
+            <a:pPr marL="742950" lvl="1" indent="-285750">
+              <a:lnSpc>
+                <a:spcPct val="150000"/>
+              </a:lnSpc>
+              <a:buFont typeface="Arial" panose="020B0604020202020204" pitchFamily="34" charset="0"/>
+              <a:buChar char="•"/>
+            </a:pPr>
+            <a:r>
+              <a:rPr kumimoji="0" lang="en-US" altLang="en-US" sz="1300" b="1" i="0" u="none" strike="noStrike" cap="none" normalizeH="0" baseline="0">
+                <a:ln>
+                  <a:noFill/>
+                </a:ln>
+                <a:solidFill>
+                  <a:schemeClr val="tx1"/>
+                </a:solidFill>
+                <a:effectLst/>
+                <a:latin typeface="Arial" panose="020B0604020202020204" pitchFamily="34" charset="0"/>
+              </a:rPr>
+              <a:t>Gate</a:t>
+            </a:r>
+            <a:r>
+              <a:rPr kumimoji="0" lang="en-US" altLang="en-US" sz="1300" b="0" i="0" u="none" strike="noStrike" cap="none" normalizeH="0" baseline="0">
+                <a:ln>
+                  <a:noFill/>
+                </a:ln>
+                <a:solidFill>
+                  <a:schemeClr val="tx1"/>
+                </a:solidFill>
+                <a:effectLst/>
+                <a:latin typeface="Arial" panose="020B0604020202020204" pitchFamily="34" charset="0"/>
+              </a:rPr>
+              <a:t> nədir və nə üçün istifadə olunur?</a:t>
+            </a:r>
+          </a:p>
+          <a:p>
+            <a:pPr marL="742950" lvl="1" indent="-285750">
+              <a:lnSpc>
+                <a:spcPct val="150000"/>
+              </a:lnSpc>
+              <a:buFont typeface="Arial" panose="020B0604020202020204" pitchFamily="34" charset="0"/>
+              <a:buChar char="•"/>
+            </a:pPr>
+            <a:r>
+              <a:rPr kumimoji="0" lang="en-US" altLang="en-US" sz="1300" b="1" i="0" u="none" strike="noStrike" cap="none" normalizeH="0" baseline="0">
+                <a:ln>
+                  <a:noFill/>
+                </a:ln>
+                <a:solidFill>
+                  <a:schemeClr val="tx1"/>
+                </a:solidFill>
+                <a:effectLst/>
+                <a:latin typeface="Arial" panose="020B0604020202020204" pitchFamily="34" charset="0"/>
+              </a:rPr>
+              <a:t>Gate</a:t>
+            </a:r>
+            <a:r>
+              <a:rPr kumimoji="0" lang="en-US" altLang="en-US" sz="1300" b="0" i="0" u="none" strike="noStrike" cap="none" normalizeH="0" baseline="0">
+                <a:ln>
+                  <a:noFill/>
+                </a:ln>
+                <a:solidFill>
+                  <a:schemeClr val="tx1"/>
+                </a:solidFill>
+                <a:effectLst/>
+                <a:latin typeface="Arial" panose="020B0604020202020204" pitchFamily="34" charset="0"/>
+              </a:rPr>
+              <a:t>-lərin harada və necə tanımlandığını.</a:t>
+            </a:r>
+          </a:p>
+          <a:p>
+            <a:pPr marL="742950" lvl="1" indent="-285750">
+              <a:lnSpc>
+                <a:spcPct val="150000"/>
+              </a:lnSpc>
+              <a:buFont typeface="Arial" panose="020B0604020202020204" pitchFamily="34" charset="0"/>
+              <a:buChar char="•"/>
+            </a:pPr>
+            <a:r>
+              <a:rPr kumimoji="0" lang="en-US" altLang="en-US" sz="1300" b="0" i="0" u="none" strike="noStrike" cap="none" normalizeH="0" baseline="0">
+                <a:ln>
+                  <a:noFill/>
+                </a:ln>
+                <a:solidFill>
+                  <a:schemeClr val="tx1"/>
+                </a:solidFill>
+                <a:effectLst/>
+                <a:latin typeface="Arial" panose="020B0604020202020204" pitchFamily="34" charset="0"/>
+              </a:rPr>
+              <a:t>İcazələrin (</a:t>
+            </a:r>
+            <a:r>
+              <a:rPr kumimoji="0" lang="az-Latn-AZ" altLang="en-US" sz="1300" b="0" i="0" u="none" strike="noStrike" cap="none" normalizeH="0" baseline="0">
+                <a:ln>
+                  <a:noFill/>
+                </a:ln>
+                <a:solidFill>
+                  <a:schemeClr val="tx1"/>
+                </a:solidFill>
+                <a:effectLst/>
+                <a:latin typeface="Arial" panose="020B0604020202020204" pitchFamily="34" charset="0"/>
+              </a:rPr>
+              <a:t> </a:t>
+            </a:r>
+            <a:r>
+              <a:rPr kumimoji="0" lang="en-US" altLang="en-US" sz="1300" b="1" i="0" u="none" strike="noStrike" cap="none" normalizeH="0" baseline="0">
+                <a:ln>
+                  <a:noFill/>
+                </a:ln>
+                <a:solidFill>
+                  <a:srgbClr val="FF0000"/>
+                </a:solidFill>
+                <a:effectLst/>
+                <a:latin typeface="Arial" panose="020B0604020202020204" pitchFamily="34" charset="0"/>
+              </a:rPr>
+              <a:t>authorize()</a:t>
+            </a:r>
+            <a:r>
+              <a:rPr kumimoji="0" lang="az-Latn-AZ" altLang="en-US" sz="1300" b="1" i="0" u="none" strike="noStrike" cap="none" normalizeH="0" baseline="0">
+                <a:ln>
+                  <a:noFill/>
+                </a:ln>
+                <a:solidFill>
+                  <a:srgbClr val="FF0000"/>
+                </a:solidFill>
+                <a:effectLst/>
+                <a:latin typeface="Arial" panose="020B0604020202020204" pitchFamily="34" charset="0"/>
+              </a:rPr>
+              <a:t> </a:t>
+            </a:r>
+            <a:r>
+              <a:rPr kumimoji="0" lang="en-US" altLang="en-US" sz="1300" b="0" i="0" u="none" strike="noStrike" cap="none" normalizeH="0" baseline="0">
+                <a:ln>
+                  <a:noFill/>
+                </a:ln>
+                <a:solidFill>
+                  <a:schemeClr val="tx1"/>
+                </a:solidFill>
+                <a:effectLst/>
+                <a:latin typeface="Arial" panose="020B0604020202020204" pitchFamily="34" charset="0"/>
+              </a:rPr>
+              <a:t>) controller içində necə yoxlanıldığını.</a:t>
+            </a:r>
+          </a:p>
+          <a:p>
+            <a:pPr marL="742950" lvl="1" indent="-285750">
+              <a:lnSpc>
+                <a:spcPct val="150000"/>
+              </a:lnSpc>
+              <a:buFont typeface="Arial" panose="020B0604020202020204" pitchFamily="34" charset="0"/>
+              <a:buChar char="•"/>
+            </a:pPr>
+            <a:r>
+              <a:rPr kumimoji="0" lang="en-US" altLang="en-US" sz="1300" b="0" i="0" u="none" strike="noStrike" cap="none" normalizeH="0" baseline="0">
+                <a:ln>
+                  <a:noFill/>
+                </a:ln>
+                <a:solidFill>
+                  <a:schemeClr val="tx1"/>
+                </a:solidFill>
+                <a:effectLst/>
+                <a:latin typeface="Arial" panose="020B0604020202020204" pitchFamily="34" charset="0"/>
+              </a:rPr>
+              <a:t>Real həyatdan nümunə ilə: </a:t>
+            </a:r>
+            <a:r>
+              <a:rPr kumimoji="0" lang="en-US" altLang="en-US" sz="1300" b="1" i="0" u="none" strike="noStrike" cap="none" normalizeH="0" baseline="0">
+                <a:ln>
+                  <a:noFill/>
+                </a:ln>
+                <a:solidFill>
+                  <a:schemeClr val="tx1"/>
+                </a:solidFill>
+                <a:effectLst/>
+                <a:latin typeface="Arial" panose="020B0604020202020204" pitchFamily="34" charset="0"/>
+              </a:rPr>
+              <a:t>create_post</a:t>
+            </a:r>
+            <a:r>
+              <a:rPr kumimoji="0" lang="en-US" altLang="en-US" sz="1300" b="0" i="0" u="none" strike="noStrike" cap="none" normalizeH="0" baseline="0">
+                <a:ln>
+                  <a:noFill/>
+                </a:ln>
+                <a:solidFill>
+                  <a:schemeClr val="tx1"/>
+                </a:solidFill>
+                <a:effectLst/>
+                <a:latin typeface="Arial" panose="020B0604020202020204" pitchFamily="34" charset="0"/>
+              </a:rPr>
+              <a:t>, </a:t>
+            </a:r>
+            <a:r>
+              <a:rPr kumimoji="0" lang="en-US" altLang="en-US" sz="1300" b="1" i="0" u="none" strike="noStrike" cap="none" normalizeH="0" baseline="0">
+                <a:ln>
+                  <a:noFill/>
+                </a:ln>
+                <a:solidFill>
+                  <a:schemeClr val="tx1"/>
+                </a:solidFill>
+                <a:effectLst/>
+                <a:latin typeface="Arial" panose="020B0604020202020204" pitchFamily="34" charset="0"/>
+              </a:rPr>
+              <a:t>edit_post</a:t>
+            </a:r>
+            <a:r>
+              <a:rPr kumimoji="0" lang="en-US" altLang="en-US" sz="1300" b="0" i="0" u="none" strike="noStrike" cap="none" normalizeH="0" baseline="0">
+                <a:ln>
+                  <a:noFill/>
+                </a:ln>
+                <a:solidFill>
+                  <a:schemeClr val="tx1"/>
+                </a:solidFill>
+                <a:effectLst/>
+                <a:latin typeface="Arial" panose="020B0604020202020204" pitchFamily="34" charset="0"/>
+              </a:rPr>
+              <a:t>, </a:t>
+            </a:r>
+            <a:r>
+              <a:rPr kumimoji="0" lang="en-US" altLang="en-US" sz="1300" b="1" i="0" u="none" strike="noStrike" cap="none" normalizeH="0" baseline="0">
+                <a:ln>
+                  <a:noFill/>
+                </a:ln>
+                <a:solidFill>
+                  <a:schemeClr val="tx1"/>
+                </a:solidFill>
+                <a:effectLst/>
+                <a:latin typeface="Arial" panose="020B0604020202020204" pitchFamily="34" charset="0"/>
+              </a:rPr>
+              <a:t>delete_post </a:t>
+            </a:r>
+            <a:r>
+              <a:rPr kumimoji="0" lang="en-US" altLang="en-US" sz="1300" b="0" i="0" u="none" strike="noStrike" cap="none" normalizeH="0" baseline="0">
+                <a:ln>
+                  <a:noFill/>
+                </a:ln>
+                <a:solidFill>
+                  <a:schemeClr val="tx1"/>
+                </a:solidFill>
+                <a:effectLst/>
+                <a:latin typeface="Arial" panose="020B0604020202020204" pitchFamily="34" charset="0"/>
+              </a:rPr>
+              <a:t>icazələrinin idarə olunması.</a:t>
+            </a:r>
+            <a:endParaRPr kumimoji="0" lang="az-Latn-AZ" altLang="en-US" sz="1300" b="0" i="0" u="none" strike="noStrike" cap="none" normalizeH="0" baseline="0">
+              <a:ln>
+                <a:noFill/>
+              </a:ln>
+              <a:solidFill>
+                <a:schemeClr val="tx1"/>
+              </a:solidFill>
+              <a:effectLst/>
+              <a:latin typeface="Arial" panose="020B0604020202020204" pitchFamily="34" charset="0"/>
+            </a:endParaRPr>
+          </a:p>
+          <a:p>
+            <a:pPr>
+              <a:lnSpc>
+                <a:spcPct val="150000"/>
+              </a:lnSpc>
+              <a:buNone/>
+            </a:pPr>
+            <a:endParaRPr lang="az-Latn-AZ" altLang="en-US" sz="1300">
+              <a:latin typeface="Arial" panose="020B0604020202020204" pitchFamily="34" charset="0"/>
+            </a:endParaRPr>
+          </a:p>
+          <a:p>
+            <a:pPr>
+              <a:lnSpc>
+                <a:spcPct val="150000"/>
+              </a:lnSpc>
+              <a:buNone/>
+            </a:pPr>
+            <a:endParaRPr kumimoji="0" lang="az-Latn-AZ" altLang="en-US" sz="1300" b="0" i="0" u="none" strike="noStrike" cap="none" normalizeH="0" baseline="0">
+              <a:ln>
+                <a:noFill/>
+              </a:ln>
+              <a:solidFill>
+                <a:schemeClr val="tx1"/>
+              </a:solidFill>
+              <a:effectLst/>
+              <a:latin typeface="Arial" panose="020B0604020202020204" pitchFamily="34" charset="0"/>
+            </a:endParaRPr>
+          </a:p>
+          <a:p>
+            <a:pPr>
+              <a:lnSpc>
+                <a:spcPct val="150000"/>
+              </a:lnSpc>
+              <a:buNone/>
+            </a:pPr>
+            <a:endParaRPr kumimoji="0" lang="az-Latn-AZ" altLang="en-US" sz="1300" b="0" i="0" u="none" strike="noStrike" cap="none" normalizeH="0" baseline="0">
+              <a:ln>
+                <a:noFill/>
+              </a:ln>
+              <a:solidFill>
+                <a:schemeClr val="tx1"/>
+              </a:solidFill>
+              <a:effectLst/>
+              <a:latin typeface="Arial" panose="020B0604020202020204" pitchFamily="34" charset="0"/>
+            </a:endParaRPr>
+          </a:p>
+          <a:p>
+            <a:pPr>
+              <a:lnSpc>
+                <a:spcPct val="150000"/>
+              </a:lnSpc>
+              <a:buNone/>
+            </a:pPr>
+            <a:r>
+              <a:rPr kumimoji="0" lang="en-US" altLang="en-US" sz="1300" b="1" i="0" u="none" strike="noStrike" cap="none" normalizeH="0" baseline="0">
+                <a:ln>
+                  <a:noFill/>
+                </a:ln>
+                <a:solidFill>
+                  <a:srgbClr val="00B050"/>
+                </a:solidFill>
+                <a:effectLst/>
+                <a:latin typeface="Arial" panose="020B0604020202020204" pitchFamily="34" charset="0"/>
+              </a:rPr>
+              <a:t>1. Authorization nədir və Gate nə edir?</a:t>
+            </a:r>
+          </a:p>
+          <a:p>
+            <a:pPr>
+              <a:lnSpc>
+                <a:spcPct val="150000"/>
+              </a:lnSpc>
+              <a:buNone/>
+            </a:pPr>
+            <a:r>
+              <a:rPr kumimoji="0" lang="en-US" altLang="en-US" sz="1300" b="1" i="0" u="none" strike="noStrike" cap="none" normalizeH="0" baseline="0">
+                <a:ln>
+                  <a:noFill/>
+                </a:ln>
+                <a:solidFill>
+                  <a:schemeClr val="tx1"/>
+                </a:solidFill>
+                <a:effectLst/>
+                <a:latin typeface="Arial" panose="020B0604020202020204" pitchFamily="34" charset="0"/>
+              </a:rPr>
+              <a:t>Authorization</a:t>
+            </a:r>
+            <a:r>
+              <a:rPr kumimoji="0" lang="en-US" altLang="en-US" sz="1300" b="0" i="0" u="none" strike="noStrike" cap="none" normalizeH="0" baseline="0">
+                <a:ln>
+                  <a:noFill/>
+                </a:ln>
+                <a:solidFill>
+                  <a:schemeClr val="tx1"/>
+                </a:solidFill>
+                <a:effectLst/>
+                <a:latin typeface="Arial" panose="020B0604020202020204" pitchFamily="34" charset="0"/>
+              </a:rPr>
+              <a:t>, bir istifadəçinin müəyyən əməliyyatı (məsələn: post yaratmaq, redaktə etmək, silmək) icra etməyə ixtiyarı olub olmadığını yoxlamaqdır.</a:t>
+            </a:r>
+            <a:endParaRPr kumimoji="0" lang="az-Latn-AZ" altLang="en-US" sz="1300" b="0" i="0" u="none" strike="noStrike" cap="none" normalizeH="0" baseline="0">
+              <a:ln>
+                <a:noFill/>
+              </a:ln>
+              <a:solidFill>
+                <a:schemeClr val="tx1"/>
+              </a:solidFill>
+              <a:effectLst/>
+              <a:latin typeface="Arial" panose="020B0604020202020204" pitchFamily="34" charset="0"/>
+            </a:endParaRPr>
+          </a:p>
+          <a:p>
+            <a:pPr>
+              <a:lnSpc>
+                <a:spcPct val="150000"/>
+              </a:lnSpc>
+              <a:buNone/>
+            </a:pPr>
+            <a:endParaRPr kumimoji="0" lang="en-US" altLang="en-US" sz="1300" b="0" i="0" u="none" strike="noStrike" cap="none" normalizeH="0" baseline="0">
+              <a:ln>
+                <a:noFill/>
+              </a:ln>
+              <a:solidFill>
+                <a:schemeClr val="tx1"/>
+              </a:solidFill>
+              <a:effectLst/>
+              <a:latin typeface="Arial" panose="020B0604020202020204" pitchFamily="34" charset="0"/>
+            </a:endParaRPr>
+          </a:p>
+          <a:p>
+            <a:pPr>
+              <a:lnSpc>
+                <a:spcPct val="150000"/>
+              </a:lnSpc>
+              <a:buNone/>
+            </a:pPr>
+            <a:r>
+              <a:rPr kumimoji="0" lang="en-US" altLang="en-US" sz="1300" b="1" i="0" u="none" strike="noStrike" cap="none" normalizeH="0" baseline="0">
+                <a:ln>
+                  <a:noFill/>
+                </a:ln>
+                <a:solidFill>
+                  <a:schemeClr val="tx1"/>
+                </a:solidFill>
+                <a:effectLst/>
+                <a:latin typeface="Arial" panose="020B0604020202020204" pitchFamily="34" charset="0"/>
+              </a:rPr>
+              <a:t>Gate</a:t>
+            </a:r>
+            <a:r>
+              <a:rPr kumimoji="0" lang="en-US" altLang="en-US" sz="1300" b="0" i="0" u="none" strike="noStrike" cap="none" normalizeH="0" baseline="0">
+                <a:ln>
+                  <a:noFill/>
+                </a:ln>
+                <a:solidFill>
+                  <a:schemeClr val="tx1"/>
+                </a:solidFill>
+                <a:effectLst/>
+                <a:latin typeface="Arial" panose="020B0604020202020204" pitchFamily="34" charset="0"/>
+              </a:rPr>
+              <a:t> – Laravel-də bu yoxlamaları aparmaq üçün funksional və yüngül </a:t>
+            </a:r>
+            <a:r>
+              <a:rPr kumimoji="0" lang="en-US" altLang="en-US" sz="1300" b="1" i="0" u="none" strike="noStrike" cap="none" normalizeH="0" baseline="0">
+                <a:ln>
+                  <a:noFill/>
+                </a:ln>
+                <a:solidFill>
+                  <a:schemeClr val="tx1"/>
+                </a:solidFill>
+                <a:effectLst/>
+                <a:latin typeface="Arial" panose="020B0604020202020204" pitchFamily="34" charset="0"/>
+              </a:rPr>
+              <a:t>auth mexanizmidir</a:t>
+            </a:r>
+            <a:r>
+              <a:rPr kumimoji="0" lang="en-US" altLang="en-US" sz="1300" b="0" i="0" u="none" strike="noStrike" cap="none" normalizeH="0" baseline="0">
+                <a:ln>
+                  <a:noFill/>
+                </a:ln>
+                <a:solidFill>
+                  <a:schemeClr val="tx1"/>
+                </a:solidFill>
+                <a:effectLst/>
+                <a:latin typeface="Arial" panose="020B0604020202020204" pitchFamily="34" charset="0"/>
+              </a:rPr>
               <a:t>.</a:t>
             </a:r>
+          </a:p>
+          <a:p>
+            <a:pPr marL="742950" lvl="1" indent="-285750">
+              <a:lnSpc>
+                <a:spcPct val="150000"/>
+              </a:lnSpc>
+              <a:buFont typeface="Arial" panose="020B0604020202020204" pitchFamily="34" charset="0"/>
+              <a:buChar char="•"/>
+            </a:pPr>
+            <a:r>
+              <a:rPr kumimoji="0" lang="en-US" altLang="en-US" sz="1300" b="1" i="0" u="none" strike="noStrike" cap="none" normalizeH="0" baseline="0">
+                <a:ln>
+                  <a:noFill/>
+                </a:ln>
+                <a:solidFill>
+                  <a:schemeClr val="tx1"/>
+                </a:solidFill>
+                <a:effectLst/>
+                <a:latin typeface="Arial" panose="020B0604020202020204" pitchFamily="34" charset="0"/>
+              </a:rPr>
+              <a:t>Gate</a:t>
+            </a:r>
+            <a:r>
+              <a:rPr kumimoji="0" lang="en-US" altLang="en-US" sz="1300" b="0" i="0" u="none" strike="noStrike" cap="none" normalizeH="0" baseline="0">
+                <a:ln>
+                  <a:noFill/>
+                </a:ln>
+                <a:solidFill>
+                  <a:schemeClr val="tx1"/>
+                </a:solidFill>
+                <a:effectLst/>
+                <a:latin typeface="Arial" panose="020B0604020202020204" pitchFamily="34" charset="0"/>
+              </a:rPr>
+              <a:t>-lər sadə "</a:t>
+            </a:r>
+            <a:r>
+              <a:rPr kumimoji="0" lang="en-US" altLang="en-US" sz="1300" b="1" i="0" u="none" strike="noStrike" cap="none" normalizeH="0" baseline="0">
+                <a:ln>
+                  <a:noFill/>
+                </a:ln>
+                <a:solidFill>
+                  <a:schemeClr val="tx1"/>
+                </a:solidFill>
+                <a:effectLst/>
+                <a:latin typeface="Arial" panose="020B0604020202020204" pitchFamily="34" charset="0"/>
+              </a:rPr>
+              <a:t>true/false</a:t>
+            </a:r>
+            <a:r>
+              <a:rPr kumimoji="0" lang="en-US" altLang="en-US" sz="1300" b="0" i="0" u="none" strike="noStrike" cap="none" normalizeH="0" baseline="0">
+                <a:ln>
+                  <a:noFill/>
+                </a:ln>
+                <a:solidFill>
+                  <a:schemeClr val="tx1"/>
+                </a:solidFill>
+                <a:effectLst/>
+                <a:latin typeface="Arial" panose="020B0604020202020204" pitchFamily="34" charset="0"/>
+              </a:rPr>
+              <a:t>" qaytaran şərtlər əsasında işləyir.</a:t>
+            </a:r>
+          </a:p>
+          <a:p>
+            <a:pPr marL="742950" lvl="1" indent="-285750">
+              <a:lnSpc>
+                <a:spcPct val="150000"/>
+              </a:lnSpc>
+              <a:buFont typeface="Arial" panose="020B0604020202020204" pitchFamily="34" charset="0"/>
+              <a:buChar char="•"/>
+            </a:pPr>
+            <a:r>
+              <a:rPr kumimoji="0" lang="en-US" altLang="en-US" sz="1300" b="1" i="0" u="none" strike="noStrike" cap="none" normalizeH="0" baseline="0">
+                <a:ln>
+                  <a:noFill/>
+                </a:ln>
+                <a:solidFill>
+                  <a:schemeClr val="tx1"/>
+                </a:solidFill>
+                <a:effectLst/>
+                <a:latin typeface="Arial" panose="020B0604020202020204" pitchFamily="34" charset="0"/>
+              </a:rPr>
+              <a:t>Auth::user() </a:t>
+            </a:r>
+            <a:r>
+              <a:rPr kumimoji="0" lang="en-US" altLang="en-US" sz="1300" b="0" i="0" u="none" strike="noStrike" cap="none" normalizeH="0" baseline="0">
+                <a:ln>
+                  <a:noFill/>
+                </a:ln>
+                <a:solidFill>
+                  <a:schemeClr val="tx1"/>
+                </a:solidFill>
+                <a:effectLst/>
+                <a:latin typeface="Arial" panose="020B0604020202020204" pitchFamily="34" charset="0"/>
+              </a:rPr>
+              <a:t>məlumatı əsasında qərar verir.</a:t>
+            </a:r>
+            <a:endParaRPr kumimoji="0" lang="az-Latn-AZ" altLang="en-US" sz="1300" b="0" i="0" u="none" strike="noStrike" cap="none" normalizeH="0" baseline="0">
+              <a:ln>
+                <a:noFill/>
+              </a:ln>
+              <a:solidFill>
+                <a:schemeClr val="tx1"/>
+              </a:solidFill>
+              <a:effectLst/>
+              <a:latin typeface="Arial" panose="020B0604020202020204" pitchFamily="34" charset="0"/>
+            </a:endParaRPr>
           </a:p>
         </p:txBody>
       </p:sp>
     </p:spTree>
     <p:extLst>
       <p:ext uri="{BB962C8B-B14F-4D97-AF65-F5344CB8AC3E}">
-        <p14:creationId xmlns:p14="http://schemas.microsoft.com/office/powerpoint/2010/main" val="3095838342"/>
+        <p14:creationId xmlns:p14="http://schemas.microsoft.com/office/powerpoint/2010/main" val="3407987586"/>
+      </p:ext>
+    </p:extLst>
+  </p:cSld>
+  <p:clrMapOvr>
+    <a:masterClrMapping/>
+  </p:clrMapOvr>
+</p:sld>
+</file>
+
+<file path=ppt/slides/slide6.xml><?xml version="1.0" encoding="utf-8"?>
+<p:sld xmlns:a="http://schemas.openxmlformats.org/drawingml/2006/main" xmlns:r="http://schemas.openxmlformats.org/officeDocument/2006/relationships" xmlns:p="http://schemas.openxmlformats.org/presentationml/2006/main">
+  <p:cSld>
+    <p:spTree>
+      <p:nvGrpSpPr>
+        <p:cNvPr id="1" name="">
+          <a:extLst>
+            <a:ext uri="{FF2B5EF4-FFF2-40B4-BE49-F238E27FC236}">
+              <a16:creationId xmlns:a16="http://schemas.microsoft.com/office/drawing/2014/main" id="{35640C9C-4EB4-2F16-8ACA-664C460146E0}"/>
+            </a:ext>
+          </a:extLst>
+        </p:cNvPr>
+        <p:cNvGrpSpPr/>
+        <p:nvPr/>
+      </p:nvGrpSpPr>
+      <p:grpSpPr>
+        <a:xfrm>
+          <a:off x="0" y="0"/>
+          <a:ext cx="0" cy="0"/>
+          <a:chOff x="0" y="0"/>
+          <a:chExt cx="0" cy="0"/>
+        </a:xfrm>
+      </p:grpSpPr>
+      <p:sp>
+        <p:nvSpPr>
+          <p:cNvPr id="3" name="TextBox 2">
+            <a:extLst>
+              <a:ext uri="{FF2B5EF4-FFF2-40B4-BE49-F238E27FC236}">
+                <a16:creationId xmlns:a16="http://schemas.microsoft.com/office/drawing/2014/main" id="{494D3353-4A14-9999-7740-C455339616D1}"/>
+              </a:ext>
+            </a:extLst>
+          </p:cNvPr>
+          <p:cNvSpPr txBox="1"/>
+          <p:nvPr/>
+        </p:nvSpPr>
+        <p:spPr>
+          <a:xfrm>
+            <a:off x="217714" y="255046"/>
+            <a:ext cx="11756571" cy="2155847"/>
+          </a:xfrm>
+          <a:prstGeom prst="rect">
+            <a:avLst/>
+          </a:prstGeom>
+          <a:noFill/>
+        </p:spPr>
+        <p:txBody>
+          <a:bodyPr wrap="square">
+            <a:spAutoFit/>
+          </a:bodyPr>
+          <a:lstStyle/>
+          <a:p>
+            <a:pPr>
+              <a:lnSpc>
+                <a:spcPct val="150000"/>
+              </a:lnSpc>
+              <a:buNone/>
+            </a:pPr>
+            <a:r>
+              <a:rPr kumimoji="0" lang="en-US" altLang="en-US" sz="1300" b="1" i="0" u="none" strike="noStrike" cap="none" normalizeH="0" baseline="0">
+                <a:ln>
+                  <a:noFill/>
+                </a:ln>
+                <a:solidFill>
+                  <a:srgbClr val="00B050"/>
+                </a:solidFill>
+                <a:effectLst/>
+                <a:latin typeface="Arial" panose="020B0604020202020204" pitchFamily="34" charset="0"/>
+              </a:rPr>
+              <a:t>2. Gate-lərin Təyini – AuthServiceProvider.php</a:t>
+            </a:r>
+            <a:endParaRPr kumimoji="0" lang="az-Latn-AZ" altLang="en-US" sz="1300" b="1" i="0" u="none" strike="noStrike" cap="none" normalizeH="0" baseline="0">
+              <a:ln>
+                <a:noFill/>
+              </a:ln>
+              <a:solidFill>
+                <a:srgbClr val="00B050"/>
+              </a:solidFill>
+              <a:effectLst/>
+              <a:latin typeface="Arial" panose="020B0604020202020204" pitchFamily="34" charset="0"/>
+            </a:endParaRPr>
+          </a:p>
+          <a:p>
+            <a:pPr>
+              <a:lnSpc>
+                <a:spcPct val="150000"/>
+              </a:lnSpc>
+              <a:buNone/>
+            </a:pPr>
+            <a:endParaRPr kumimoji="0" lang="en-US" altLang="en-US" sz="1300" b="1" i="0" u="none" strike="noStrike" cap="none" normalizeH="0" baseline="0">
+              <a:ln>
+                <a:noFill/>
+              </a:ln>
+              <a:solidFill>
+                <a:srgbClr val="00B050"/>
+              </a:solidFill>
+              <a:effectLst/>
+              <a:latin typeface="Arial" panose="020B0604020202020204" pitchFamily="34" charset="0"/>
+            </a:endParaRPr>
+          </a:p>
+          <a:p>
+            <a:pPr>
+              <a:lnSpc>
+                <a:spcPct val="150000"/>
+              </a:lnSpc>
+              <a:buNone/>
+            </a:pPr>
+            <a:r>
+              <a:rPr kumimoji="0" lang="en-US" altLang="en-US" sz="1300" b="1" i="0" u="none" strike="noStrike" cap="none" normalizeH="0" baseline="0">
+                <a:ln>
+                  <a:noFill/>
+                </a:ln>
+                <a:solidFill>
+                  <a:schemeClr val="tx1"/>
+                </a:solidFill>
+                <a:effectLst/>
+                <a:latin typeface="Arial" panose="020B0604020202020204" pitchFamily="34" charset="0"/>
+              </a:rPr>
+              <a:t>Gate</a:t>
+            </a:r>
+            <a:r>
+              <a:rPr kumimoji="0" lang="en-US" altLang="en-US" sz="1300" b="0" i="0" u="none" strike="noStrike" cap="none" normalizeH="0" baseline="0">
+                <a:ln>
+                  <a:noFill/>
+                </a:ln>
+                <a:solidFill>
+                  <a:schemeClr val="tx1"/>
+                </a:solidFill>
+                <a:effectLst/>
+                <a:latin typeface="Arial" panose="020B0604020202020204" pitchFamily="34" charset="0"/>
+              </a:rPr>
+              <a:t>-lər adətən </a:t>
+            </a:r>
+            <a:r>
+              <a:rPr kumimoji="0" lang="en-US" altLang="en-US" sz="1300" b="1" i="0" u="none" strike="noStrike" cap="none" normalizeH="0" baseline="0">
+                <a:ln>
+                  <a:noFill/>
+                </a:ln>
+                <a:solidFill>
+                  <a:srgbClr val="0070C0"/>
+                </a:solidFill>
+                <a:effectLst/>
+                <a:latin typeface="Arial" panose="020B0604020202020204" pitchFamily="34" charset="0"/>
+              </a:rPr>
+              <a:t>AuthServiceProvider</a:t>
+            </a:r>
+            <a:r>
+              <a:rPr kumimoji="0" lang="en-US" altLang="en-US" sz="1300" b="0" i="0" u="none" strike="noStrike" cap="none" normalizeH="0" baseline="0">
+                <a:ln>
+                  <a:noFill/>
+                </a:ln>
+                <a:solidFill>
+                  <a:schemeClr val="tx1"/>
+                </a:solidFill>
+                <a:effectLst/>
+                <a:latin typeface="Arial" panose="020B0604020202020204" pitchFamily="34" charset="0"/>
+              </a:rPr>
+              <a:t> faylında təyin edilir:</a:t>
+            </a:r>
+          </a:p>
+          <a:p>
+            <a:pPr>
+              <a:lnSpc>
+                <a:spcPct val="150000"/>
+              </a:lnSpc>
+              <a:buNone/>
+            </a:pPr>
+            <a:endParaRPr kumimoji="0" lang="en-US" altLang="en-US" sz="1300" b="0" i="0" u="none" strike="noStrike" cap="none" normalizeH="0" baseline="0">
+              <a:ln>
+                <a:noFill/>
+              </a:ln>
+              <a:solidFill>
+                <a:schemeClr val="tx1"/>
+              </a:solidFill>
+              <a:effectLst/>
+              <a:latin typeface="Arial" panose="020B0604020202020204" pitchFamily="34" charset="0"/>
+            </a:endParaRPr>
+          </a:p>
+          <a:p>
+            <a:pPr>
+              <a:lnSpc>
+                <a:spcPct val="150000"/>
+              </a:lnSpc>
+              <a:buNone/>
+            </a:pPr>
+            <a:r>
+              <a:rPr kumimoji="0" lang="en-US" altLang="en-US" sz="1300" b="0" i="0" u="none" strike="noStrike" cap="none" normalizeH="0" baseline="0">
+                <a:ln>
+                  <a:noFill/>
+                </a:ln>
+                <a:solidFill>
+                  <a:schemeClr val="tx1"/>
+                </a:solidFill>
+                <a:effectLst/>
+                <a:latin typeface="Arial" panose="020B0604020202020204" pitchFamily="34" charset="0"/>
+              </a:rPr>
+              <a:t>📁 Yol: </a:t>
+            </a:r>
+            <a:r>
+              <a:rPr kumimoji="0" lang="en-US" altLang="en-US" sz="1300" b="0" i="0" u="sng" strike="noStrike" cap="none" normalizeH="0" baseline="0">
+                <a:ln>
+                  <a:noFill/>
+                </a:ln>
+                <a:solidFill>
+                  <a:srgbClr val="00B0F0"/>
+                </a:solidFill>
+                <a:effectLst/>
+                <a:latin typeface="Arial" panose="020B0604020202020204" pitchFamily="34" charset="0"/>
+              </a:rPr>
+              <a:t>app\Providers\AuthServiceProvider.php</a:t>
+            </a:r>
+            <a:endParaRPr kumimoji="0" lang="az-Latn-AZ" altLang="en-US" sz="1300" b="0" i="0" u="sng" strike="noStrike" cap="none" normalizeH="0" baseline="0">
+              <a:ln>
+                <a:noFill/>
+              </a:ln>
+              <a:solidFill>
+                <a:srgbClr val="00B0F0"/>
+              </a:solidFill>
+              <a:effectLst/>
+              <a:latin typeface="Arial" panose="020B0604020202020204" pitchFamily="34" charset="0"/>
+            </a:endParaRPr>
+          </a:p>
+          <a:p>
+            <a:pPr>
+              <a:lnSpc>
+                <a:spcPct val="150000"/>
+              </a:lnSpc>
+              <a:buNone/>
+            </a:pPr>
+            <a:endParaRPr lang="az-Latn-AZ" altLang="en-US" sz="1300">
+              <a:latin typeface="Arial" panose="020B0604020202020204" pitchFamily="34" charset="0"/>
+            </a:endParaRPr>
+          </a:p>
+          <a:p>
+            <a:pPr>
+              <a:lnSpc>
+                <a:spcPct val="150000"/>
+              </a:lnSpc>
+              <a:buNone/>
+            </a:pPr>
+            <a:endParaRPr kumimoji="0" lang="en-US" altLang="en-US" sz="1300" b="0" i="0" u="none" strike="noStrike" cap="none" normalizeH="0" baseline="0">
+              <a:ln>
+                <a:noFill/>
+              </a:ln>
+              <a:solidFill>
+                <a:schemeClr val="tx1"/>
+              </a:solidFill>
+              <a:effectLst/>
+              <a:latin typeface="Arial" panose="020B0604020202020204" pitchFamily="34" charset="0"/>
+            </a:endParaRPr>
+          </a:p>
+        </p:txBody>
+      </p:sp>
+      <p:pic>
+        <p:nvPicPr>
+          <p:cNvPr id="4" name="Picture 3">
+            <a:extLst>
+              <a:ext uri="{FF2B5EF4-FFF2-40B4-BE49-F238E27FC236}">
+                <a16:creationId xmlns:a16="http://schemas.microsoft.com/office/drawing/2014/main" id="{A0422211-F4C2-F6A9-A041-FEF95178D7FC}"/>
+              </a:ext>
+            </a:extLst>
+          </p:cNvPr>
+          <p:cNvPicPr>
+            <a:picLocks noChangeAspect="1"/>
+          </p:cNvPicPr>
+          <p:nvPr/>
+        </p:nvPicPr>
+        <p:blipFill>
+          <a:blip r:embed="rId2"/>
+          <a:stretch>
+            <a:fillRect/>
+          </a:stretch>
+        </p:blipFill>
+        <p:spPr>
+          <a:xfrm>
+            <a:off x="0" y="1921164"/>
+            <a:ext cx="3004688" cy="4936836"/>
+          </a:xfrm>
+          <a:prstGeom prst="rect">
+            <a:avLst/>
+          </a:prstGeom>
+        </p:spPr>
+      </p:pic>
+      <p:sp>
+        <p:nvSpPr>
+          <p:cNvPr id="6" name="TextBox 5">
+            <a:extLst>
+              <a:ext uri="{FF2B5EF4-FFF2-40B4-BE49-F238E27FC236}">
+                <a16:creationId xmlns:a16="http://schemas.microsoft.com/office/drawing/2014/main" id="{81ED60BA-F9B1-8E15-1A9D-17A866808769}"/>
+              </a:ext>
+            </a:extLst>
+          </p:cNvPr>
+          <p:cNvSpPr txBox="1"/>
+          <p:nvPr/>
+        </p:nvSpPr>
+        <p:spPr>
+          <a:xfrm>
+            <a:off x="3528291" y="4540851"/>
+            <a:ext cx="8445994" cy="2062103"/>
+          </a:xfrm>
+          <a:prstGeom prst="rect">
+            <a:avLst/>
+          </a:prstGeom>
+          <a:noFill/>
+        </p:spPr>
+        <p:txBody>
+          <a:bodyPr wrap="square">
+            <a:spAutoFit/>
+          </a:bodyPr>
+          <a:lstStyle/>
+          <a:p>
+            <a:r>
+              <a:rPr lang="en-US" sz="1600" b="1"/>
+              <a:t>Nə baş verir burada?</a:t>
+            </a:r>
+            <a:endParaRPr lang="az-Latn-AZ" sz="1600" b="1"/>
+          </a:p>
+          <a:p>
+            <a:endParaRPr lang="en-US" sz="1600" b="1"/>
+          </a:p>
+          <a:p>
+            <a:pPr marL="285750" indent="-285750">
+              <a:buFont typeface="Arial" panose="020B0604020202020204" pitchFamily="34" charset="0"/>
+              <a:buChar char="•"/>
+            </a:pPr>
+            <a:r>
+              <a:rPr lang="en-US" sz="1600"/>
+              <a:t>Biz </a:t>
+            </a:r>
+            <a:r>
+              <a:rPr lang="en-US" sz="1600" b="1"/>
+              <a:t>Gate::define('gate_adi', function(){ ... }) </a:t>
+            </a:r>
+            <a:r>
+              <a:rPr lang="en-US" sz="1600"/>
+              <a:t>ilə 3 fərqli icazə qaydası yaradırıq.</a:t>
+            </a:r>
+          </a:p>
+          <a:p>
+            <a:pPr marL="285750" indent="-285750">
+              <a:buFont typeface="Arial" panose="020B0604020202020204" pitchFamily="34" charset="0"/>
+              <a:buChar char="•"/>
+            </a:pPr>
+            <a:endParaRPr lang="en-US" sz="1600"/>
+          </a:p>
+          <a:p>
+            <a:pPr marL="285750" indent="-285750">
+              <a:buFont typeface="Arial" panose="020B0604020202020204" pitchFamily="34" charset="0"/>
+              <a:buChar char="•"/>
+            </a:pPr>
+            <a:r>
+              <a:rPr lang="en-US" sz="1600"/>
+              <a:t>Hər birində return </a:t>
+            </a:r>
+            <a:r>
+              <a:rPr lang="en-US" sz="1600" b="1"/>
+              <a:t>Auth::user()-&gt;is_admin </a:t>
+            </a:r>
+            <a:r>
+              <a:rPr lang="en-US" sz="1600"/>
+              <a:t>– yəni, yalnız admin olan istifadəçilərə icazə verilir.</a:t>
+            </a:r>
+          </a:p>
+          <a:p>
+            <a:pPr marL="285750" indent="-285750">
+              <a:buFont typeface="Arial" panose="020B0604020202020204" pitchFamily="34" charset="0"/>
+              <a:buChar char="•"/>
+            </a:pPr>
+            <a:endParaRPr lang="en-US" sz="1600"/>
+          </a:p>
+          <a:p>
+            <a:pPr marL="285750" indent="-285750">
+              <a:buFont typeface="Arial" panose="020B0604020202020204" pitchFamily="34" charset="0"/>
+              <a:buChar char="•"/>
+            </a:pPr>
+            <a:r>
+              <a:rPr lang="en-US" sz="1600"/>
+              <a:t>Gate'lərdə </a:t>
+            </a:r>
+            <a:r>
+              <a:rPr lang="en-US" sz="1600" b="1"/>
+              <a:t>Auth::user() </a:t>
+            </a:r>
+            <a:r>
+              <a:rPr lang="en-US" sz="1600"/>
+              <a:t>vasitəsilə cari istifadəçini yoxlayırıq.</a:t>
+            </a:r>
+            <a:endParaRPr lang="az-Latn-AZ" sz="1600"/>
+          </a:p>
+          <a:p>
+            <a:endParaRPr lang="en-US" sz="1600"/>
+          </a:p>
+        </p:txBody>
+      </p:sp>
+    </p:spTree>
+    <p:extLst>
+      <p:ext uri="{BB962C8B-B14F-4D97-AF65-F5344CB8AC3E}">
+        <p14:creationId xmlns:p14="http://schemas.microsoft.com/office/powerpoint/2010/main" val="395702708"/>
+      </p:ext>
+    </p:extLst>
+  </p:cSld>
+  <p:clrMapOvr>
+    <a:masterClrMapping/>
+  </p:clrMapOvr>
+</p:sld>
+</file>
+
+<file path=ppt/slides/slide7.xml><?xml version="1.0" encoding="utf-8"?>
+<p:sld xmlns:a="http://schemas.openxmlformats.org/drawingml/2006/main" xmlns:r="http://schemas.openxmlformats.org/officeDocument/2006/relationships" xmlns:p="http://schemas.openxmlformats.org/presentationml/2006/main">
+  <p:cSld>
+    <p:spTree>
+      <p:nvGrpSpPr>
+        <p:cNvPr id="1" name="">
+          <a:extLst>
+            <a:ext uri="{FF2B5EF4-FFF2-40B4-BE49-F238E27FC236}">
+              <a16:creationId xmlns:a16="http://schemas.microsoft.com/office/drawing/2014/main" id="{64216F38-C8E4-54FC-F9B2-100EF7DB252C}"/>
+            </a:ext>
+          </a:extLst>
+        </p:cNvPr>
+        <p:cNvGrpSpPr/>
+        <p:nvPr/>
+      </p:nvGrpSpPr>
+      <p:grpSpPr>
+        <a:xfrm>
+          <a:off x="0" y="0"/>
+          <a:ext cx="0" cy="0"/>
+          <a:chOff x="0" y="0"/>
+          <a:chExt cx="0" cy="0"/>
+        </a:xfrm>
+      </p:grpSpPr>
+      <p:sp>
+        <p:nvSpPr>
+          <p:cNvPr id="3" name="TextBox 2">
+            <a:extLst>
+              <a:ext uri="{FF2B5EF4-FFF2-40B4-BE49-F238E27FC236}">
+                <a16:creationId xmlns:a16="http://schemas.microsoft.com/office/drawing/2014/main" id="{682B3473-ACCC-F71A-6719-7FB887B2F3F1}"/>
+              </a:ext>
+            </a:extLst>
+          </p:cNvPr>
+          <p:cNvSpPr txBox="1"/>
+          <p:nvPr/>
+        </p:nvSpPr>
+        <p:spPr>
+          <a:xfrm>
+            <a:off x="217714" y="255046"/>
+            <a:ext cx="11756571" cy="5456750"/>
+          </a:xfrm>
+          <a:prstGeom prst="rect">
+            <a:avLst/>
+          </a:prstGeom>
+          <a:noFill/>
+        </p:spPr>
+        <p:txBody>
+          <a:bodyPr wrap="square">
+            <a:spAutoFit/>
+          </a:bodyPr>
+          <a:lstStyle/>
+          <a:p>
+            <a:pPr>
+              <a:lnSpc>
+                <a:spcPct val="150000"/>
+              </a:lnSpc>
+              <a:buNone/>
+            </a:pPr>
+            <a:r>
+              <a:rPr kumimoji="0" lang="en-US" altLang="en-US" sz="1300" b="1" i="0" u="none" strike="noStrike" cap="none" normalizeH="0" baseline="0">
+                <a:ln>
+                  <a:noFill/>
+                </a:ln>
+                <a:solidFill>
+                  <a:srgbClr val="00B050"/>
+                </a:solidFill>
+                <a:effectLst/>
+                <a:latin typeface="Arial" panose="020B0604020202020204" pitchFamily="34" charset="0"/>
+              </a:rPr>
+              <a:t>3. Gate istifadəsi – Controller daxilində authorize()</a:t>
+            </a:r>
+            <a:endParaRPr kumimoji="0" lang="az-Latn-AZ" altLang="en-US" sz="1300" b="1" i="0" u="none" strike="noStrike" cap="none" normalizeH="0" baseline="0">
+              <a:ln>
+                <a:noFill/>
+              </a:ln>
+              <a:solidFill>
+                <a:srgbClr val="00B050"/>
+              </a:solidFill>
+              <a:effectLst/>
+              <a:latin typeface="Arial" panose="020B0604020202020204" pitchFamily="34" charset="0"/>
+            </a:endParaRPr>
+          </a:p>
+          <a:p>
+            <a:pPr>
+              <a:lnSpc>
+                <a:spcPct val="150000"/>
+              </a:lnSpc>
+              <a:buNone/>
+            </a:pPr>
+            <a:endParaRPr kumimoji="0" lang="en-US" altLang="en-US" sz="1300" b="1" i="0" u="none" strike="noStrike" cap="none" normalizeH="0" baseline="0">
+              <a:ln>
+                <a:noFill/>
+              </a:ln>
+              <a:solidFill>
+                <a:srgbClr val="00B050"/>
+              </a:solidFill>
+              <a:effectLst/>
+              <a:latin typeface="Arial" panose="020B0604020202020204" pitchFamily="34" charset="0"/>
+            </a:endParaRPr>
+          </a:p>
+          <a:p>
+            <a:pPr>
+              <a:lnSpc>
+                <a:spcPct val="150000"/>
+              </a:lnSpc>
+              <a:buNone/>
+            </a:pPr>
+            <a:r>
+              <a:rPr kumimoji="0" lang="en-US" altLang="en-US" sz="1300" b="0" i="0" u="none" strike="noStrike" cap="none" normalizeH="0" baseline="0">
+                <a:ln>
+                  <a:noFill/>
+                </a:ln>
+                <a:solidFill>
+                  <a:schemeClr val="tx1"/>
+                </a:solidFill>
+                <a:effectLst/>
+                <a:latin typeface="Arial" panose="020B0604020202020204" pitchFamily="34" charset="0"/>
+              </a:rPr>
+              <a:t>📁 </a:t>
+            </a:r>
+            <a:r>
+              <a:rPr kumimoji="0" lang="en-US" altLang="en-US" sz="1300" b="1" i="0" u="none" strike="noStrike" cap="none" normalizeH="0" baseline="0">
+                <a:ln>
+                  <a:noFill/>
+                </a:ln>
+                <a:solidFill>
+                  <a:schemeClr val="tx1"/>
+                </a:solidFill>
+                <a:effectLst/>
+                <a:latin typeface="Arial" panose="020B0604020202020204" pitchFamily="34" charset="0"/>
+              </a:rPr>
+              <a:t>Yol</a:t>
+            </a:r>
+            <a:r>
+              <a:rPr kumimoji="0" lang="en-US" altLang="en-US" sz="1300" b="0" i="0" u="none" strike="noStrike" cap="none" normalizeH="0" baseline="0">
+                <a:ln>
+                  <a:noFill/>
+                </a:ln>
+                <a:solidFill>
+                  <a:schemeClr val="tx1"/>
+                </a:solidFill>
+                <a:effectLst/>
+                <a:latin typeface="Arial" panose="020B0604020202020204" pitchFamily="34" charset="0"/>
+              </a:rPr>
+              <a:t>: </a:t>
+            </a:r>
+            <a:r>
+              <a:rPr kumimoji="0" lang="en-US" altLang="en-US" sz="1300" b="0" i="0" u="sng" strike="noStrike" cap="none" normalizeH="0" baseline="0">
+                <a:ln>
+                  <a:noFill/>
+                </a:ln>
+                <a:solidFill>
+                  <a:srgbClr val="00B0F0"/>
+                </a:solidFill>
+                <a:effectLst/>
+                <a:latin typeface="Arial" panose="020B0604020202020204" pitchFamily="34" charset="0"/>
+              </a:rPr>
+              <a:t>app\Http\Controllers\PostController.php</a:t>
+            </a:r>
+            <a:endParaRPr kumimoji="0" lang="az-Latn-AZ" altLang="en-US" sz="1300" b="0" i="0" u="sng" strike="noStrike" cap="none" normalizeH="0" baseline="0">
+              <a:ln>
+                <a:noFill/>
+              </a:ln>
+              <a:solidFill>
+                <a:srgbClr val="00B0F0"/>
+              </a:solidFill>
+              <a:effectLst/>
+              <a:latin typeface="Arial" panose="020B0604020202020204" pitchFamily="34" charset="0"/>
+            </a:endParaRPr>
+          </a:p>
+          <a:p>
+            <a:pPr>
+              <a:lnSpc>
+                <a:spcPct val="150000"/>
+              </a:lnSpc>
+              <a:buNone/>
+            </a:pPr>
+            <a:endParaRPr lang="az-Latn-AZ" altLang="en-US" sz="1300">
+              <a:latin typeface="Arial" panose="020B0604020202020204" pitchFamily="34" charset="0"/>
+            </a:endParaRPr>
+          </a:p>
+          <a:p>
+            <a:pPr>
+              <a:lnSpc>
+                <a:spcPct val="150000"/>
+              </a:lnSpc>
+              <a:buNone/>
+            </a:pPr>
+            <a:endParaRPr kumimoji="0" lang="az-Latn-AZ" altLang="en-US" sz="1300" b="0" i="0" u="none" strike="noStrike" cap="none" normalizeH="0" baseline="0">
+              <a:ln>
+                <a:noFill/>
+              </a:ln>
+              <a:solidFill>
+                <a:schemeClr val="tx1"/>
+              </a:solidFill>
+              <a:effectLst/>
+              <a:latin typeface="Arial" panose="020B0604020202020204" pitchFamily="34" charset="0"/>
+            </a:endParaRPr>
+          </a:p>
+          <a:p>
+            <a:pPr>
+              <a:lnSpc>
+                <a:spcPct val="150000"/>
+              </a:lnSpc>
+              <a:buNone/>
+            </a:pPr>
+            <a:endParaRPr lang="az-Latn-AZ" altLang="en-US" sz="1300">
+              <a:latin typeface="Arial" panose="020B0604020202020204" pitchFamily="34" charset="0"/>
+            </a:endParaRPr>
+          </a:p>
+          <a:p>
+            <a:pPr>
+              <a:lnSpc>
+                <a:spcPct val="150000"/>
+              </a:lnSpc>
+              <a:buNone/>
+            </a:pPr>
+            <a:endParaRPr kumimoji="0" lang="az-Latn-AZ" altLang="en-US" sz="1300" b="0" i="0" u="none" strike="noStrike" cap="none" normalizeH="0" baseline="0">
+              <a:ln>
+                <a:noFill/>
+              </a:ln>
+              <a:solidFill>
+                <a:schemeClr val="tx1"/>
+              </a:solidFill>
+              <a:effectLst/>
+              <a:latin typeface="Arial" panose="020B0604020202020204" pitchFamily="34" charset="0"/>
+            </a:endParaRPr>
+          </a:p>
+          <a:p>
+            <a:pPr>
+              <a:lnSpc>
+                <a:spcPct val="150000"/>
+              </a:lnSpc>
+              <a:buNone/>
+            </a:pPr>
+            <a:endParaRPr lang="az-Latn-AZ" altLang="en-US" sz="1300">
+              <a:latin typeface="Arial" panose="020B0604020202020204" pitchFamily="34" charset="0"/>
+            </a:endParaRPr>
+          </a:p>
+          <a:p>
+            <a:pPr>
+              <a:lnSpc>
+                <a:spcPct val="150000"/>
+              </a:lnSpc>
+              <a:buNone/>
+            </a:pPr>
+            <a:endParaRPr kumimoji="0" lang="az-Latn-AZ" altLang="en-US" sz="1300" b="0" i="0" u="none" strike="noStrike" cap="none" normalizeH="0" baseline="0">
+              <a:ln>
+                <a:noFill/>
+              </a:ln>
+              <a:solidFill>
+                <a:schemeClr val="tx1"/>
+              </a:solidFill>
+              <a:effectLst/>
+              <a:latin typeface="Arial" panose="020B0604020202020204" pitchFamily="34" charset="0"/>
+            </a:endParaRPr>
+          </a:p>
+          <a:p>
+            <a:pPr>
+              <a:lnSpc>
+                <a:spcPct val="150000"/>
+              </a:lnSpc>
+              <a:buNone/>
+            </a:pPr>
+            <a:endParaRPr lang="az-Latn-AZ" altLang="en-US" sz="1300">
+              <a:latin typeface="Arial" panose="020B0604020202020204" pitchFamily="34" charset="0"/>
+            </a:endParaRPr>
+          </a:p>
+          <a:p>
+            <a:pPr>
+              <a:lnSpc>
+                <a:spcPct val="150000"/>
+              </a:lnSpc>
+              <a:buNone/>
+            </a:pPr>
+            <a:endParaRPr lang="az-Latn-AZ" altLang="en-US" sz="1300">
+              <a:latin typeface="Arial" panose="020B0604020202020204" pitchFamily="34" charset="0"/>
+            </a:endParaRPr>
+          </a:p>
+          <a:p>
+            <a:pPr>
+              <a:lnSpc>
+                <a:spcPct val="150000"/>
+              </a:lnSpc>
+              <a:buNone/>
+            </a:pPr>
+            <a:r>
+              <a:rPr kumimoji="0" lang="az-Latn-AZ" altLang="en-US" sz="1300" b="1" i="0" u="none" strike="noStrike" cap="none" normalizeH="0" baseline="0">
+                <a:ln>
+                  <a:noFill/>
+                </a:ln>
+                <a:solidFill>
+                  <a:schemeClr val="tx1"/>
+                </a:solidFill>
+                <a:effectLst/>
+                <a:latin typeface="Arial" panose="020B0604020202020204" pitchFamily="34" charset="0"/>
+              </a:rPr>
+              <a:t>Nə baş verir burada?</a:t>
+            </a:r>
+          </a:p>
+          <a:p>
+            <a:pPr marL="742950" lvl="1" indent="-285750">
+              <a:lnSpc>
+                <a:spcPct val="150000"/>
+              </a:lnSpc>
+              <a:buFont typeface="Arial" panose="020B0604020202020204" pitchFamily="34" charset="0"/>
+              <a:buChar char="•"/>
+            </a:pPr>
+            <a:r>
+              <a:rPr kumimoji="0" lang="az-Latn-AZ" altLang="en-US" sz="1300" b="1" i="0" u="none" strike="noStrike" cap="none" normalizeH="0" baseline="0">
+                <a:ln>
+                  <a:noFill/>
+                </a:ln>
+                <a:solidFill>
+                  <a:schemeClr val="tx1"/>
+                </a:solidFill>
+                <a:effectLst/>
+                <a:latin typeface="Arial" panose="020B0604020202020204" pitchFamily="34" charset="0"/>
+              </a:rPr>
+              <a:t>$this-&gt;authorize('create_post') </a:t>
+            </a:r>
+            <a:r>
+              <a:rPr kumimoji="0" lang="az-Latn-AZ" altLang="en-US" sz="1300" b="0" i="0" u="none" strike="noStrike" cap="none" normalizeH="0" baseline="0">
+                <a:ln>
+                  <a:noFill/>
+                </a:ln>
+                <a:solidFill>
+                  <a:schemeClr val="tx1"/>
+                </a:solidFill>
+                <a:effectLst/>
+                <a:latin typeface="Arial" panose="020B0604020202020204" pitchFamily="34" charset="0"/>
+              </a:rPr>
+              <a:t>Laravel-ə deyir: "Bu istifadəçiyə </a:t>
+            </a:r>
+            <a:r>
+              <a:rPr kumimoji="0" lang="az-Latn-AZ" altLang="en-US" sz="1300" b="1" i="0" u="none" strike="noStrike" cap="none" normalizeH="0" baseline="0">
+                <a:ln>
+                  <a:noFill/>
+                </a:ln>
+                <a:solidFill>
+                  <a:schemeClr val="tx1"/>
+                </a:solidFill>
+                <a:effectLst/>
+                <a:latin typeface="Arial" panose="020B0604020202020204" pitchFamily="34" charset="0"/>
+              </a:rPr>
+              <a:t>'create_post</a:t>
+            </a:r>
+            <a:r>
+              <a:rPr kumimoji="0" lang="az-Latn-AZ" altLang="en-US" sz="1300" b="0" i="0" u="none" strike="noStrike" cap="none" normalizeH="0" baseline="0">
+                <a:ln>
+                  <a:noFill/>
+                </a:ln>
+                <a:solidFill>
+                  <a:schemeClr val="tx1"/>
+                </a:solidFill>
+                <a:effectLst/>
+                <a:latin typeface="Arial" panose="020B0604020202020204" pitchFamily="34" charset="0"/>
+              </a:rPr>
+              <a:t>' əməliyyatına icazə verilibmi?"</a:t>
+            </a:r>
+          </a:p>
+          <a:p>
+            <a:pPr marL="742950" lvl="1" indent="-285750">
+              <a:lnSpc>
+                <a:spcPct val="150000"/>
+              </a:lnSpc>
+              <a:buFont typeface="Arial" panose="020B0604020202020204" pitchFamily="34" charset="0"/>
+              <a:buChar char="•"/>
+            </a:pPr>
+            <a:endParaRPr kumimoji="0" lang="az-Latn-AZ" altLang="en-US" sz="1300" b="0" i="0" u="none" strike="noStrike" cap="none" normalizeH="0" baseline="0">
+              <a:ln>
+                <a:noFill/>
+              </a:ln>
+              <a:solidFill>
+                <a:schemeClr val="tx1"/>
+              </a:solidFill>
+              <a:effectLst/>
+              <a:latin typeface="Arial" panose="020B0604020202020204" pitchFamily="34" charset="0"/>
+            </a:endParaRPr>
+          </a:p>
+          <a:p>
+            <a:pPr marL="742950" lvl="1" indent="-285750">
+              <a:lnSpc>
+                <a:spcPct val="150000"/>
+              </a:lnSpc>
+              <a:buFont typeface="Arial" panose="020B0604020202020204" pitchFamily="34" charset="0"/>
+              <a:buChar char="•"/>
+            </a:pPr>
+            <a:r>
+              <a:rPr kumimoji="0" lang="az-Latn-AZ" altLang="en-US" sz="1300" b="0" i="0" u="none" strike="noStrike" cap="none" normalizeH="0" baseline="0">
+                <a:ln>
+                  <a:noFill/>
+                </a:ln>
+                <a:solidFill>
+                  <a:schemeClr val="tx1"/>
+                </a:solidFill>
+                <a:effectLst/>
+                <a:latin typeface="Arial" panose="020B0604020202020204" pitchFamily="34" charset="0"/>
+              </a:rPr>
+              <a:t>Əgər </a:t>
+            </a:r>
+            <a:r>
+              <a:rPr kumimoji="0" lang="az-Latn-AZ" altLang="en-US" sz="1300" b="1" i="0" u="none" strike="noStrike" cap="none" normalizeH="0" baseline="0">
+                <a:ln>
+                  <a:noFill/>
+                </a:ln>
+                <a:solidFill>
+                  <a:schemeClr val="tx1"/>
+                </a:solidFill>
+                <a:effectLst/>
+                <a:latin typeface="Arial" panose="020B0604020202020204" pitchFamily="34" charset="0"/>
+              </a:rPr>
+              <a:t>Gate true </a:t>
+            </a:r>
+            <a:r>
+              <a:rPr kumimoji="0" lang="az-Latn-AZ" altLang="en-US" sz="1300" b="0" i="0" u="none" strike="noStrike" cap="none" normalizeH="0" baseline="0">
+                <a:ln>
+                  <a:noFill/>
+                </a:ln>
+                <a:solidFill>
+                  <a:schemeClr val="tx1"/>
+                </a:solidFill>
+                <a:effectLst/>
+                <a:latin typeface="Arial" panose="020B0604020202020204" pitchFamily="34" charset="0"/>
+              </a:rPr>
+              <a:t>qaytararsa → əməliyyat davam edir.</a:t>
+            </a:r>
+          </a:p>
+          <a:p>
+            <a:pPr marL="742950" lvl="1" indent="-285750">
+              <a:lnSpc>
+                <a:spcPct val="150000"/>
+              </a:lnSpc>
+              <a:buFont typeface="Arial" panose="020B0604020202020204" pitchFamily="34" charset="0"/>
+              <a:buChar char="•"/>
+            </a:pPr>
+            <a:endParaRPr kumimoji="0" lang="az-Latn-AZ" altLang="en-US" sz="1300" b="0" i="0" u="none" strike="noStrike" cap="none" normalizeH="0" baseline="0">
+              <a:ln>
+                <a:noFill/>
+              </a:ln>
+              <a:solidFill>
+                <a:schemeClr val="tx1"/>
+              </a:solidFill>
+              <a:effectLst/>
+              <a:latin typeface="Arial" panose="020B0604020202020204" pitchFamily="34" charset="0"/>
+            </a:endParaRPr>
+          </a:p>
+          <a:p>
+            <a:pPr marL="742950" lvl="1" indent="-285750">
+              <a:lnSpc>
+                <a:spcPct val="150000"/>
+              </a:lnSpc>
+              <a:buFont typeface="Arial" panose="020B0604020202020204" pitchFamily="34" charset="0"/>
+              <a:buChar char="•"/>
+            </a:pPr>
+            <a:r>
+              <a:rPr kumimoji="0" lang="az-Latn-AZ" altLang="en-US" sz="1300" b="0" i="0" u="none" strike="noStrike" cap="none" normalizeH="0" baseline="0">
+                <a:ln>
+                  <a:noFill/>
+                </a:ln>
+                <a:solidFill>
+                  <a:schemeClr val="tx1"/>
+                </a:solidFill>
+                <a:effectLst/>
+                <a:latin typeface="Arial" panose="020B0604020202020204" pitchFamily="34" charset="0"/>
+              </a:rPr>
+              <a:t>Əgər </a:t>
+            </a:r>
+            <a:r>
+              <a:rPr kumimoji="0" lang="az-Latn-AZ" altLang="en-US" sz="1300" b="1" i="0" u="none" strike="noStrike" cap="none" normalizeH="0" baseline="0">
+                <a:ln>
+                  <a:noFill/>
+                </a:ln>
+                <a:solidFill>
+                  <a:schemeClr val="tx1"/>
+                </a:solidFill>
+                <a:effectLst/>
+                <a:latin typeface="Arial" panose="020B0604020202020204" pitchFamily="34" charset="0"/>
+              </a:rPr>
+              <a:t>false</a:t>
+            </a:r>
+            <a:r>
+              <a:rPr kumimoji="0" lang="az-Latn-AZ" altLang="en-US" sz="1300" b="0" i="0" u="none" strike="noStrike" cap="none" normalizeH="0" baseline="0">
+                <a:ln>
+                  <a:noFill/>
+                </a:ln>
+                <a:solidFill>
+                  <a:schemeClr val="tx1"/>
+                </a:solidFill>
+                <a:effectLst/>
+                <a:latin typeface="Arial" panose="020B0604020202020204" pitchFamily="34" charset="0"/>
+              </a:rPr>
+              <a:t> qaytararsa → </a:t>
+            </a:r>
+            <a:r>
+              <a:rPr kumimoji="0" lang="az-Latn-AZ" altLang="en-US" sz="1300" b="1" i="0" u="none" strike="noStrike" cap="none" normalizeH="0" baseline="0">
+                <a:ln>
+                  <a:noFill/>
+                </a:ln>
+                <a:solidFill>
+                  <a:schemeClr val="tx1"/>
+                </a:solidFill>
+                <a:effectLst/>
+                <a:latin typeface="Arial" panose="020B0604020202020204" pitchFamily="34" charset="0"/>
+              </a:rPr>
+              <a:t>403 Forbidden </a:t>
+            </a:r>
+            <a:r>
+              <a:rPr kumimoji="0" lang="az-Latn-AZ" altLang="en-US" sz="1300" b="0" i="0" u="none" strike="noStrike" cap="none" normalizeH="0" baseline="0">
+                <a:ln>
+                  <a:noFill/>
+                </a:ln>
+                <a:solidFill>
+                  <a:schemeClr val="tx1"/>
+                </a:solidFill>
+                <a:effectLst/>
+                <a:latin typeface="Arial" panose="020B0604020202020204" pitchFamily="34" charset="0"/>
+              </a:rPr>
+              <a:t>səhv qaytarılır.</a:t>
+            </a:r>
+          </a:p>
+          <a:p>
+            <a:pPr>
+              <a:lnSpc>
+                <a:spcPct val="150000"/>
+              </a:lnSpc>
+              <a:buNone/>
+            </a:pPr>
+            <a:endParaRPr kumimoji="0" lang="en-US" altLang="en-US" sz="1300" b="0" i="0" u="none" strike="noStrike" cap="none" normalizeH="0" baseline="0">
+              <a:ln>
+                <a:noFill/>
+              </a:ln>
+              <a:solidFill>
+                <a:schemeClr val="tx1"/>
+              </a:solidFill>
+              <a:effectLst/>
+              <a:latin typeface="Arial" panose="020B0604020202020204" pitchFamily="34" charset="0"/>
+            </a:endParaRPr>
+          </a:p>
+        </p:txBody>
+      </p:sp>
+      <p:pic>
+        <p:nvPicPr>
+          <p:cNvPr id="4" name="Picture 3">
+            <a:extLst>
+              <a:ext uri="{FF2B5EF4-FFF2-40B4-BE49-F238E27FC236}">
+                <a16:creationId xmlns:a16="http://schemas.microsoft.com/office/drawing/2014/main" id="{347F6F62-2E09-1E6B-8A45-2478BF927FF2}"/>
+              </a:ext>
+            </a:extLst>
+          </p:cNvPr>
+          <p:cNvPicPr>
+            <a:picLocks noChangeAspect="1"/>
+          </p:cNvPicPr>
+          <p:nvPr/>
+        </p:nvPicPr>
+        <p:blipFill>
+          <a:blip r:embed="rId2"/>
+          <a:stretch>
+            <a:fillRect/>
+          </a:stretch>
+        </p:blipFill>
+        <p:spPr>
+          <a:xfrm>
+            <a:off x="0" y="1335407"/>
+            <a:ext cx="5010849" cy="1619476"/>
+          </a:xfrm>
+          <a:prstGeom prst="rect">
+            <a:avLst/>
+          </a:prstGeom>
+        </p:spPr>
+      </p:pic>
+    </p:spTree>
+    <p:extLst>
+      <p:ext uri="{BB962C8B-B14F-4D97-AF65-F5344CB8AC3E}">
+        <p14:creationId xmlns:p14="http://schemas.microsoft.com/office/powerpoint/2010/main" val="810452978"/>
+      </p:ext>
+    </p:extLst>
+  </p:cSld>
+  <p:clrMapOvr>
+    <a:masterClrMapping/>
+  </p:clrMapOvr>
+</p:sld>
+</file>
+
+<file path=ppt/slides/slide8.xml><?xml version="1.0" encoding="utf-8"?>
+<p:sld xmlns:a="http://schemas.openxmlformats.org/drawingml/2006/main" xmlns:r="http://schemas.openxmlformats.org/officeDocument/2006/relationships" xmlns:p="http://schemas.openxmlformats.org/presentationml/2006/main">
+  <p:cSld>
+    <p:spTree>
+      <p:nvGrpSpPr>
+        <p:cNvPr id="1" name="">
+          <a:extLst>
+            <a:ext uri="{FF2B5EF4-FFF2-40B4-BE49-F238E27FC236}">
+              <a16:creationId xmlns:a16="http://schemas.microsoft.com/office/drawing/2014/main" id="{2CD31FBA-D4F2-9AE4-D998-F31912B3C8ED}"/>
+            </a:ext>
+          </a:extLst>
+        </p:cNvPr>
+        <p:cNvGrpSpPr/>
+        <p:nvPr/>
+      </p:nvGrpSpPr>
+      <p:grpSpPr>
+        <a:xfrm>
+          <a:off x="0" y="0"/>
+          <a:ext cx="0" cy="0"/>
+          <a:chOff x="0" y="0"/>
+          <a:chExt cx="0" cy="0"/>
+        </a:xfrm>
+      </p:grpSpPr>
+      <p:sp>
+        <p:nvSpPr>
+          <p:cNvPr id="3" name="TextBox 2">
+            <a:extLst>
+              <a:ext uri="{FF2B5EF4-FFF2-40B4-BE49-F238E27FC236}">
+                <a16:creationId xmlns:a16="http://schemas.microsoft.com/office/drawing/2014/main" id="{E604E1EB-22BD-2F34-2DC3-A00DEB16608D}"/>
+              </a:ext>
+            </a:extLst>
+          </p:cNvPr>
+          <p:cNvSpPr txBox="1"/>
+          <p:nvPr/>
+        </p:nvSpPr>
+        <p:spPr>
+          <a:xfrm>
+            <a:off x="217714" y="255046"/>
+            <a:ext cx="11756571" cy="1255600"/>
+          </a:xfrm>
+          <a:prstGeom prst="rect">
+            <a:avLst/>
+          </a:prstGeom>
+          <a:noFill/>
+        </p:spPr>
+        <p:txBody>
+          <a:bodyPr wrap="square">
+            <a:spAutoFit/>
+          </a:bodyPr>
+          <a:lstStyle/>
+          <a:p>
+            <a:pPr>
+              <a:lnSpc>
+                <a:spcPct val="150000"/>
+              </a:lnSpc>
+              <a:buNone/>
+            </a:pPr>
+            <a:r>
+              <a:rPr kumimoji="0" lang="en-US" altLang="en-US" sz="1300" b="1" i="0" u="none" strike="noStrike" cap="none" normalizeH="0" baseline="0">
+                <a:ln>
+                  <a:noFill/>
+                </a:ln>
+                <a:solidFill>
+                  <a:srgbClr val="00B050"/>
+                </a:solidFill>
+                <a:effectLst/>
+                <a:latin typeface="Arial" panose="020B0604020202020204" pitchFamily="34" charset="0"/>
+              </a:rPr>
+              <a:t>4. Real istifadəçi ssenarisi</a:t>
+            </a:r>
+            <a:endParaRPr kumimoji="0" lang="az-Latn-AZ" altLang="en-US" sz="1300" b="1" i="0" u="none" strike="noStrike" cap="none" normalizeH="0" baseline="0">
+              <a:ln>
+                <a:noFill/>
+              </a:ln>
+              <a:solidFill>
+                <a:srgbClr val="00B050"/>
+              </a:solidFill>
+              <a:effectLst/>
+              <a:latin typeface="Arial" panose="020B0604020202020204" pitchFamily="34" charset="0"/>
+            </a:endParaRPr>
+          </a:p>
+          <a:p>
+            <a:pPr>
+              <a:lnSpc>
+                <a:spcPct val="150000"/>
+              </a:lnSpc>
+              <a:buNone/>
+            </a:pPr>
+            <a:endParaRPr lang="az-Latn-AZ" altLang="en-US" sz="1300">
+              <a:latin typeface="Arial" panose="020B0604020202020204" pitchFamily="34" charset="0"/>
+            </a:endParaRPr>
+          </a:p>
+          <a:p>
+            <a:pPr>
+              <a:lnSpc>
+                <a:spcPct val="150000"/>
+              </a:lnSpc>
+              <a:buNone/>
+            </a:pPr>
+            <a:endParaRPr kumimoji="0" lang="az-Latn-AZ" altLang="en-US" sz="1300" b="0" i="0" u="none" strike="noStrike" cap="none" normalizeH="0" baseline="0">
+              <a:ln>
+                <a:noFill/>
+              </a:ln>
+              <a:solidFill>
+                <a:schemeClr val="tx1"/>
+              </a:solidFill>
+              <a:effectLst/>
+              <a:latin typeface="Arial" panose="020B0604020202020204" pitchFamily="34" charset="0"/>
+            </a:endParaRPr>
+          </a:p>
+          <a:p>
+            <a:pPr>
+              <a:lnSpc>
+                <a:spcPct val="150000"/>
+              </a:lnSpc>
+              <a:buNone/>
+            </a:pPr>
+            <a:endParaRPr kumimoji="0" lang="en-US" altLang="en-US" sz="1300" b="0" i="0" u="none" strike="noStrike" cap="none" normalizeH="0" baseline="0">
+              <a:ln>
+                <a:noFill/>
+              </a:ln>
+              <a:solidFill>
+                <a:schemeClr val="tx1"/>
+              </a:solidFill>
+              <a:effectLst/>
+              <a:latin typeface="Arial" panose="020B0604020202020204" pitchFamily="34" charset="0"/>
+            </a:endParaRPr>
+          </a:p>
+        </p:txBody>
+      </p:sp>
+      <p:graphicFrame>
+        <p:nvGraphicFramePr>
+          <p:cNvPr id="2" name="Table 1">
+            <a:extLst>
+              <a:ext uri="{FF2B5EF4-FFF2-40B4-BE49-F238E27FC236}">
+                <a16:creationId xmlns:a16="http://schemas.microsoft.com/office/drawing/2014/main" id="{E247C03D-CA08-9FC9-905A-C82F20134BF6}"/>
+              </a:ext>
+            </a:extLst>
+          </p:cNvPr>
+          <p:cNvGraphicFramePr>
+            <a:graphicFrameLocks noGrp="1"/>
+          </p:cNvGraphicFramePr>
+          <p:nvPr>
+            <p:extLst>
+              <p:ext uri="{D42A27DB-BD31-4B8C-83A1-F6EECF244321}">
+                <p14:modId xmlns:p14="http://schemas.microsoft.com/office/powerpoint/2010/main" val="2953651167"/>
+              </p:ext>
+            </p:extLst>
+          </p:nvPr>
+        </p:nvGraphicFramePr>
+        <p:xfrm>
+          <a:off x="217714" y="1115854"/>
+          <a:ext cx="10505704" cy="1377963"/>
+        </p:xfrm>
+        <a:graphic>
+          <a:graphicData uri="http://schemas.openxmlformats.org/drawingml/2006/table">
+            <a:tbl>
+              <a:tblPr/>
+              <a:tblGrid>
+                <a:gridCol w="2626426">
+                  <a:extLst>
+                    <a:ext uri="{9D8B030D-6E8A-4147-A177-3AD203B41FA5}">
+                      <a16:colId xmlns:a16="http://schemas.microsoft.com/office/drawing/2014/main" val="1511262609"/>
+                    </a:ext>
+                  </a:extLst>
+                </a:gridCol>
+                <a:gridCol w="2626426">
+                  <a:extLst>
+                    <a:ext uri="{9D8B030D-6E8A-4147-A177-3AD203B41FA5}">
+                      <a16:colId xmlns:a16="http://schemas.microsoft.com/office/drawing/2014/main" val="1393914295"/>
+                    </a:ext>
+                  </a:extLst>
+                </a:gridCol>
+                <a:gridCol w="2626426">
+                  <a:extLst>
+                    <a:ext uri="{9D8B030D-6E8A-4147-A177-3AD203B41FA5}">
+                      <a16:colId xmlns:a16="http://schemas.microsoft.com/office/drawing/2014/main" val="3545872450"/>
+                    </a:ext>
+                  </a:extLst>
+                </a:gridCol>
+                <a:gridCol w="2626426">
+                  <a:extLst>
+                    <a:ext uri="{9D8B030D-6E8A-4147-A177-3AD203B41FA5}">
+                      <a16:colId xmlns:a16="http://schemas.microsoft.com/office/drawing/2014/main" val="2850125946"/>
+                    </a:ext>
+                  </a:extLst>
+                </a:gridCol>
+              </a:tblGrid>
+              <a:tr h="459321">
+                <a:tc>
+                  <a:txBody>
+                    <a:bodyPr/>
+                    <a:lstStyle/>
+                    <a:p>
+                      <a:r>
+                        <a:rPr lang="en-US" b="1"/>
+                        <a:t>İstifadəçi</a:t>
+                      </a:r>
+                    </a:p>
+                  </a:txBody>
+                  <a:tcPr anchor="ctr">
+                    <a:lnL w="12700" cap="flat" cmpd="sng" algn="ctr">
+                      <a:solidFill>
+                        <a:schemeClr val="tx1"/>
+                      </a:solidFill>
+                      <a:prstDash val="solid"/>
+                      <a:round/>
+                      <a:headEnd type="none" w="med" len="med"/>
+                      <a:tailEnd type="none" w="med" len="med"/>
+                    </a:lnL>
+                    <a:lnR w="12700" cap="flat" cmpd="sng" algn="ctr">
+                      <a:solidFill>
+                        <a:schemeClr val="tx1"/>
+                      </a:solidFill>
+                      <a:prstDash val="solid"/>
+                      <a:round/>
+                      <a:headEnd type="none" w="med" len="med"/>
+                      <a:tailEnd type="none" w="med" len="med"/>
+                    </a:lnR>
+                    <a:lnT w="12700" cap="flat" cmpd="sng" algn="ctr">
+                      <a:solidFill>
+                        <a:schemeClr val="tx1"/>
+                      </a:solidFill>
+                      <a:prstDash val="solid"/>
+                      <a:round/>
+                      <a:headEnd type="none" w="med" len="med"/>
+                      <a:tailEnd type="none" w="med" len="med"/>
+                    </a:lnT>
+                    <a:lnB w="12700" cap="flat" cmpd="sng" algn="ctr">
+                      <a:solidFill>
+                        <a:schemeClr val="tx1"/>
+                      </a:solidFill>
+                      <a:prstDash val="solid"/>
+                      <a:round/>
+                      <a:headEnd type="none" w="med" len="med"/>
+                      <a:tailEnd type="none" w="med" len="med"/>
+                    </a:lnB>
+                    <a:solidFill>
+                      <a:schemeClr val="accent2"/>
+                    </a:solidFill>
+                  </a:tcPr>
+                </a:tc>
+                <a:tc>
+                  <a:txBody>
+                    <a:bodyPr/>
+                    <a:lstStyle/>
+                    <a:p>
+                      <a:r>
+                        <a:rPr lang="en-US" b="1"/>
+                        <a:t>is_admin</a:t>
+                      </a:r>
+                    </a:p>
+                  </a:txBody>
+                  <a:tcPr anchor="ctr">
+                    <a:lnL w="12700" cap="flat" cmpd="sng" algn="ctr">
+                      <a:solidFill>
+                        <a:schemeClr val="tx1"/>
+                      </a:solidFill>
+                      <a:prstDash val="solid"/>
+                      <a:round/>
+                      <a:headEnd type="none" w="med" len="med"/>
+                      <a:tailEnd type="none" w="med" len="med"/>
+                    </a:lnL>
+                    <a:lnR w="12700" cap="flat" cmpd="sng" algn="ctr">
+                      <a:solidFill>
+                        <a:schemeClr val="tx1"/>
+                      </a:solidFill>
+                      <a:prstDash val="solid"/>
+                      <a:round/>
+                      <a:headEnd type="none" w="med" len="med"/>
+                      <a:tailEnd type="none" w="med" len="med"/>
+                    </a:lnR>
+                    <a:lnT w="12700" cap="flat" cmpd="sng" algn="ctr">
+                      <a:solidFill>
+                        <a:schemeClr val="tx1"/>
+                      </a:solidFill>
+                      <a:prstDash val="solid"/>
+                      <a:round/>
+                      <a:headEnd type="none" w="med" len="med"/>
+                      <a:tailEnd type="none" w="med" len="med"/>
+                    </a:lnT>
+                    <a:lnB w="12700" cap="flat" cmpd="sng" algn="ctr">
+                      <a:solidFill>
+                        <a:schemeClr val="tx1"/>
+                      </a:solidFill>
+                      <a:prstDash val="solid"/>
+                      <a:round/>
+                      <a:headEnd type="none" w="med" len="med"/>
+                      <a:tailEnd type="none" w="med" len="med"/>
+                    </a:lnB>
+                    <a:solidFill>
+                      <a:schemeClr val="accent2"/>
+                    </a:solidFill>
+                  </a:tcPr>
+                </a:tc>
+                <a:tc>
+                  <a:txBody>
+                    <a:bodyPr/>
+                    <a:lstStyle/>
+                    <a:p>
+                      <a:r>
+                        <a:rPr lang="en-US" b="1"/>
+                        <a:t>create_post Gate icazəsi</a:t>
+                      </a:r>
+                    </a:p>
+                  </a:txBody>
+                  <a:tcPr anchor="ctr">
+                    <a:lnL w="12700" cap="flat" cmpd="sng" algn="ctr">
+                      <a:solidFill>
+                        <a:schemeClr val="tx1"/>
+                      </a:solidFill>
+                      <a:prstDash val="solid"/>
+                      <a:round/>
+                      <a:headEnd type="none" w="med" len="med"/>
+                      <a:tailEnd type="none" w="med" len="med"/>
+                    </a:lnL>
+                    <a:lnR w="12700" cap="flat" cmpd="sng" algn="ctr">
+                      <a:solidFill>
+                        <a:schemeClr val="tx1"/>
+                      </a:solidFill>
+                      <a:prstDash val="solid"/>
+                      <a:round/>
+                      <a:headEnd type="none" w="med" len="med"/>
+                      <a:tailEnd type="none" w="med" len="med"/>
+                    </a:lnR>
+                    <a:lnT w="12700" cap="flat" cmpd="sng" algn="ctr">
+                      <a:solidFill>
+                        <a:schemeClr val="tx1"/>
+                      </a:solidFill>
+                      <a:prstDash val="solid"/>
+                      <a:round/>
+                      <a:headEnd type="none" w="med" len="med"/>
+                      <a:tailEnd type="none" w="med" len="med"/>
+                    </a:lnT>
+                    <a:lnB w="12700" cap="flat" cmpd="sng" algn="ctr">
+                      <a:solidFill>
+                        <a:schemeClr val="tx1"/>
+                      </a:solidFill>
+                      <a:prstDash val="solid"/>
+                      <a:round/>
+                      <a:headEnd type="none" w="med" len="med"/>
+                      <a:tailEnd type="none" w="med" len="med"/>
+                    </a:lnB>
+                    <a:solidFill>
+                      <a:schemeClr val="accent2"/>
+                    </a:solidFill>
+                  </a:tcPr>
+                </a:tc>
+                <a:tc>
+                  <a:txBody>
+                    <a:bodyPr/>
+                    <a:lstStyle/>
+                    <a:p>
+                      <a:r>
+                        <a:rPr lang="en-US" b="1"/>
+                        <a:t>Nəticə</a:t>
+                      </a:r>
+                    </a:p>
+                  </a:txBody>
+                  <a:tcPr anchor="ctr">
+                    <a:lnL w="12700" cap="flat" cmpd="sng" algn="ctr">
+                      <a:solidFill>
+                        <a:schemeClr val="tx1"/>
+                      </a:solidFill>
+                      <a:prstDash val="solid"/>
+                      <a:round/>
+                      <a:headEnd type="none" w="med" len="med"/>
+                      <a:tailEnd type="none" w="med" len="med"/>
+                    </a:lnL>
+                    <a:lnR w="12700" cap="flat" cmpd="sng" algn="ctr">
+                      <a:solidFill>
+                        <a:schemeClr val="tx1"/>
+                      </a:solidFill>
+                      <a:prstDash val="solid"/>
+                      <a:round/>
+                      <a:headEnd type="none" w="med" len="med"/>
+                      <a:tailEnd type="none" w="med" len="med"/>
+                    </a:lnR>
+                    <a:lnT w="12700" cap="flat" cmpd="sng" algn="ctr">
+                      <a:solidFill>
+                        <a:schemeClr val="tx1"/>
+                      </a:solidFill>
+                      <a:prstDash val="solid"/>
+                      <a:round/>
+                      <a:headEnd type="none" w="med" len="med"/>
+                      <a:tailEnd type="none" w="med" len="med"/>
+                    </a:lnT>
+                    <a:lnB w="12700" cap="flat" cmpd="sng" algn="ctr">
+                      <a:solidFill>
+                        <a:schemeClr val="tx1"/>
+                      </a:solidFill>
+                      <a:prstDash val="solid"/>
+                      <a:round/>
+                      <a:headEnd type="none" w="med" len="med"/>
+                      <a:tailEnd type="none" w="med" len="med"/>
+                    </a:lnB>
+                    <a:solidFill>
+                      <a:schemeClr val="accent2"/>
+                    </a:solidFill>
+                  </a:tcPr>
+                </a:tc>
+                <a:extLst>
+                  <a:ext uri="{0D108BD9-81ED-4DB2-BD59-A6C34878D82A}">
+                    <a16:rowId xmlns:a16="http://schemas.microsoft.com/office/drawing/2014/main" val="1595531625"/>
+                  </a:ext>
+                </a:extLst>
+              </a:tr>
+              <a:tr h="459321">
+                <a:tc>
+                  <a:txBody>
+                    <a:bodyPr/>
+                    <a:lstStyle/>
+                    <a:p>
+                      <a:r>
+                        <a:rPr lang="en-US"/>
+                        <a:t>Ali</a:t>
+                      </a:r>
+                    </a:p>
+                  </a:txBody>
+                  <a:tcPr anchor="ctr">
+                    <a:lnL w="12700" cap="flat" cmpd="sng" algn="ctr">
+                      <a:solidFill>
+                        <a:schemeClr val="tx1"/>
+                      </a:solidFill>
+                      <a:prstDash val="solid"/>
+                      <a:round/>
+                      <a:headEnd type="none" w="med" len="med"/>
+                      <a:tailEnd type="none" w="med" len="med"/>
+                    </a:lnL>
+                    <a:lnR w="12700" cap="flat" cmpd="sng" algn="ctr">
+                      <a:solidFill>
+                        <a:schemeClr val="tx1"/>
+                      </a:solidFill>
+                      <a:prstDash val="solid"/>
+                      <a:round/>
+                      <a:headEnd type="none" w="med" len="med"/>
+                      <a:tailEnd type="none" w="med" len="med"/>
+                    </a:lnR>
+                    <a:lnT w="12700" cap="flat" cmpd="sng" algn="ctr">
+                      <a:solidFill>
+                        <a:schemeClr val="tx1"/>
+                      </a:solidFill>
+                      <a:prstDash val="solid"/>
+                      <a:round/>
+                      <a:headEnd type="none" w="med" len="med"/>
+                      <a:tailEnd type="none" w="med" len="med"/>
+                    </a:lnT>
+                    <a:lnB w="12700" cap="flat" cmpd="sng" algn="ctr">
+                      <a:solidFill>
+                        <a:schemeClr val="tx1"/>
+                      </a:solidFill>
+                      <a:prstDash val="solid"/>
+                      <a:round/>
+                      <a:headEnd type="none" w="med" len="med"/>
+                      <a:tailEnd type="none" w="med" len="med"/>
+                    </a:lnB>
+                    <a:noFill/>
+                  </a:tcPr>
+                </a:tc>
+                <a:tc>
+                  <a:txBody>
+                    <a:bodyPr/>
+                    <a:lstStyle/>
+                    <a:p>
+                      <a:r>
+                        <a:rPr lang="en-US"/>
+                        <a:t>1 (true)</a:t>
+                      </a:r>
+                    </a:p>
+                  </a:txBody>
+                  <a:tcPr anchor="ctr">
+                    <a:lnL w="12700" cap="flat" cmpd="sng" algn="ctr">
+                      <a:solidFill>
+                        <a:schemeClr val="tx1"/>
+                      </a:solidFill>
+                      <a:prstDash val="solid"/>
+                      <a:round/>
+                      <a:headEnd type="none" w="med" len="med"/>
+                      <a:tailEnd type="none" w="med" len="med"/>
+                    </a:lnL>
+                    <a:lnR w="12700" cap="flat" cmpd="sng" algn="ctr">
+                      <a:solidFill>
+                        <a:schemeClr val="tx1"/>
+                      </a:solidFill>
+                      <a:prstDash val="solid"/>
+                      <a:round/>
+                      <a:headEnd type="none" w="med" len="med"/>
+                      <a:tailEnd type="none" w="med" len="med"/>
+                    </a:lnR>
+                    <a:lnT w="12700" cap="flat" cmpd="sng" algn="ctr">
+                      <a:solidFill>
+                        <a:schemeClr val="tx1"/>
+                      </a:solidFill>
+                      <a:prstDash val="solid"/>
+                      <a:round/>
+                      <a:headEnd type="none" w="med" len="med"/>
+                      <a:tailEnd type="none" w="med" len="med"/>
+                    </a:lnT>
+                    <a:lnB w="12700" cap="flat" cmpd="sng" algn="ctr">
+                      <a:solidFill>
+                        <a:schemeClr val="tx1"/>
+                      </a:solidFill>
+                      <a:prstDash val="solid"/>
+                      <a:round/>
+                      <a:headEnd type="none" w="med" len="med"/>
+                      <a:tailEnd type="none" w="med" len="med"/>
+                    </a:lnB>
+                    <a:noFill/>
+                  </a:tcPr>
+                </a:tc>
+                <a:tc>
+                  <a:txBody>
+                    <a:bodyPr/>
+                    <a:lstStyle/>
+                    <a:p>
+                      <a:r>
+                        <a:rPr lang="en-US"/>
+                        <a:t>✅</a:t>
+                      </a:r>
+                    </a:p>
+                  </a:txBody>
+                  <a:tcPr anchor="ctr">
+                    <a:lnL w="12700" cap="flat" cmpd="sng" algn="ctr">
+                      <a:solidFill>
+                        <a:schemeClr val="tx1"/>
+                      </a:solidFill>
+                      <a:prstDash val="solid"/>
+                      <a:round/>
+                      <a:headEnd type="none" w="med" len="med"/>
+                      <a:tailEnd type="none" w="med" len="med"/>
+                    </a:lnL>
+                    <a:lnR w="12700" cap="flat" cmpd="sng" algn="ctr">
+                      <a:solidFill>
+                        <a:schemeClr val="tx1"/>
+                      </a:solidFill>
+                      <a:prstDash val="solid"/>
+                      <a:round/>
+                      <a:headEnd type="none" w="med" len="med"/>
+                      <a:tailEnd type="none" w="med" len="med"/>
+                    </a:lnR>
+                    <a:lnT w="12700" cap="flat" cmpd="sng" algn="ctr">
+                      <a:solidFill>
+                        <a:schemeClr val="tx1"/>
+                      </a:solidFill>
+                      <a:prstDash val="solid"/>
+                      <a:round/>
+                      <a:headEnd type="none" w="med" len="med"/>
+                      <a:tailEnd type="none" w="med" len="med"/>
+                    </a:lnT>
+                    <a:lnB w="12700" cap="flat" cmpd="sng" algn="ctr">
+                      <a:solidFill>
+                        <a:schemeClr val="tx1"/>
+                      </a:solidFill>
+                      <a:prstDash val="solid"/>
+                      <a:round/>
+                      <a:headEnd type="none" w="med" len="med"/>
+                      <a:tailEnd type="none" w="med" len="med"/>
+                    </a:lnB>
+                    <a:noFill/>
+                  </a:tcPr>
+                </a:tc>
+                <a:tc>
+                  <a:txBody>
+                    <a:bodyPr/>
+                    <a:lstStyle/>
+                    <a:p>
+                      <a:r>
+                        <a:rPr lang="en-US"/>
+                        <a:t>Post yaratmaq olar</a:t>
+                      </a:r>
+                    </a:p>
+                  </a:txBody>
+                  <a:tcPr anchor="ctr">
+                    <a:lnL w="12700" cap="flat" cmpd="sng" algn="ctr">
+                      <a:solidFill>
+                        <a:schemeClr val="tx1"/>
+                      </a:solidFill>
+                      <a:prstDash val="solid"/>
+                      <a:round/>
+                      <a:headEnd type="none" w="med" len="med"/>
+                      <a:tailEnd type="none" w="med" len="med"/>
+                    </a:lnL>
+                    <a:lnR w="12700" cap="flat" cmpd="sng" algn="ctr">
+                      <a:solidFill>
+                        <a:schemeClr val="tx1"/>
+                      </a:solidFill>
+                      <a:prstDash val="solid"/>
+                      <a:round/>
+                      <a:headEnd type="none" w="med" len="med"/>
+                      <a:tailEnd type="none" w="med" len="med"/>
+                    </a:lnR>
+                    <a:lnT w="12700" cap="flat" cmpd="sng" algn="ctr">
+                      <a:solidFill>
+                        <a:schemeClr val="tx1"/>
+                      </a:solidFill>
+                      <a:prstDash val="solid"/>
+                      <a:round/>
+                      <a:headEnd type="none" w="med" len="med"/>
+                      <a:tailEnd type="none" w="med" len="med"/>
+                    </a:lnT>
+                    <a:lnB w="12700" cap="flat" cmpd="sng" algn="ctr">
+                      <a:solidFill>
+                        <a:schemeClr val="tx1"/>
+                      </a:solidFill>
+                      <a:prstDash val="solid"/>
+                      <a:round/>
+                      <a:headEnd type="none" w="med" len="med"/>
+                      <a:tailEnd type="none" w="med" len="med"/>
+                    </a:lnB>
+                    <a:noFill/>
+                  </a:tcPr>
+                </a:tc>
+                <a:extLst>
+                  <a:ext uri="{0D108BD9-81ED-4DB2-BD59-A6C34878D82A}">
+                    <a16:rowId xmlns:a16="http://schemas.microsoft.com/office/drawing/2014/main" val="3098778573"/>
+                  </a:ext>
+                </a:extLst>
+              </a:tr>
+              <a:tr h="459321">
+                <a:tc>
+                  <a:txBody>
+                    <a:bodyPr/>
+                    <a:lstStyle/>
+                    <a:p>
+                      <a:r>
+                        <a:rPr lang="en-US"/>
+                        <a:t>Nigar</a:t>
+                      </a:r>
+                    </a:p>
+                  </a:txBody>
+                  <a:tcPr anchor="ctr">
+                    <a:lnL w="12700" cap="flat" cmpd="sng" algn="ctr">
+                      <a:solidFill>
+                        <a:schemeClr val="tx1"/>
+                      </a:solidFill>
+                      <a:prstDash val="solid"/>
+                      <a:round/>
+                      <a:headEnd type="none" w="med" len="med"/>
+                      <a:tailEnd type="none" w="med" len="med"/>
+                    </a:lnL>
+                    <a:lnR w="12700" cap="flat" cmpd="sng" algn="ctr">
+                      <a:solidFill>
+                        <a:schemeClr val="tx1"/>
+                      </a:solidFill>
+                      <a:prstDash val="solid"/>
+                      <a:round/>
+                      <a:headEnd type="none" w="med" len="med"/>
+                      <a:tailEnd type="none" w="med" len="med"/>
+                    </a:lnR>
+                    <a:lnT w="12700" cap="flat" cmpd="sng" algn="ctr">
+                      <a:solidFill>
+                        <a:schemeClr val="tx1"/>
+                      </a:solidFill>
+                      <a:prstDash val="solid"/>
+                      <a:round/>
+                      <a:headEnd type="none" w="med" len="med"/>
+                      <a:tailEnd type="none" w="med" len="med"/>
+                    </a:lnT>
+                    <a:lnB w="12700" cap="flat" cmpd="sng" algn="ctr">
+                      <a:solidFill>
+                        <a:schemeClr val="tx1"/>
+                      </a:solidFill>
+                      <a:prstDash val="solid"/>
+                      <a:round/>
+                      <a:headEnd type="none" w="med" len="med"/>
+                      <a:tailEnd type="none" w="med" len="med"/>
+                    </a:lnB>
+                    <a:noFill/>
+                  </a:tcPr>
+                </a:tc>
+                <a:tc>
+                  <a:txBody>
+                    <a:bodyPr/>
+                    <a:lstStyle/>
+                    <a:p>
+                      <a:r>
+                        <a:rPr lang="en-US"/>
+                        <a:t>0 (false)</a:t>
+                      </a:r>
+                    </a:p>
+                  </a:txBody>
+                  <a:tcPr anchor="ctr">
+                    <a:lnL w="12700" cap="flat" cmpd="sng" algn="ctr">
+                      <a:solidFill>
+                        <a:schemeClr val="tx1"/>
+                      </a:solidFill>
+                      <a:prstDash val="solid"/>
+                      <a:round/>
+                      <a:headEnd type="none" w="med" len="med"/>
+                      <a:tailEnd type="none" w="med" len="med"/>
+                    </a:lnL>
+                    <a:lnR w="12700" cap="flat" cmpd="sng" algn="ctr">
+                      <a:solidFill>
+                        <a:schemeClr val="tx1"/>
+                      </a:solidFill>
+                      <a:prstDash val="solid"/>
+                      <a:round/>
+                      <a:headEnd type="none" w="med" len="med"/>
+                      <a:tailEnd type="none" w="med" len="med"/>
+                    </a:lnR>
+                    <a:lnT w="12700" cap="flat" cmpd="sng" algn="ctr">
+                      <a:solidFill>
+                        <a:schemeClr val="tx1"/>
+                      </a:solidFill>
+                      <a:prstDash val="solid"/>
+                      <a:round/>
+                      <a:headEnd type="none" w="med" len="med"/>
+                      <a:tailEnd type="none" w="med" len="med"/>
+                    </a:lnT>
+                    <a:lnB w="12700" cap="flat" cmpd="sng" algn="ctr">
+                      <a:solidFill>
+                        <a:schemeClr val="tx1"/>
+                      </a:solidFill>
+                      <a:prstDash val="solid"/>
+                      <a:round/>
+                      <a:headEnd type="none" w="med" len="med"/>
+                      <a:tailEnd type="none" w="med" len="med"/>
+                    </a:lnB>
+                    <a:noFill/>
+                  </a:tcPr>
+                </a:tc>
+                <a:tc>
+                  <a:txBody>
+                    <a:bodyPr/>
+                    <a:lstStyle/>
+                    <a:p>
+                      <a:r>
+                        <a:rPr lang="en-US"/>
+                        <a:t>❌</a:t>
+                      </a:r>
+                    </a:p>
+                  </a:txBody>
+                  <a:tcPr anchor="ctr">
+                    <a:lnL w="12700" cap="flat" cmpd="sng" algn="ctr">
+                      <a:solidFill>
+                        <a:schemeClr val="tx1"/>
+                      </a:solidFill>
+                      <a:prstDash val="solid"/>
+                      <a:round/>
+                      <a:headEnd type="none" w="med" len="med"/>
+                      <a:tailEnd type="none" w="med" len="med"/>
+                    </a:lnL>
+                    <a:lnR w="12700" cap="flat" cmpd="sng" algn="ctr">
+                      <a:solidFill>
+                        <a:schemeClr val="tx1"/>
+                      </a:solidFill>
+                      <a:prstDash val="solid"/>
+                      <a:round/>
+                      <a:headEnd type="none" w="med" len="med"/>
+                      <a:tailEnd type="none" w="med" len="med"/>
+                    </a:lnR>
+                    <a:lnT w="12700" cap="flat" cmpd="sng" algn="ctr">
+                      <a:solidFill>
+                        <a:schemeClr val="tx1"/>
+                      </a:solidFill>
+                      <a:prstDash val="solid"/>
+                      <a:round/>
+                      <a:headEnd type="none" w="med" len="med"/>
+                      <a:tailEnd type="none" w="med" len="med"/>
+                    </a:lnT>
+                    <a:lnB w="12700" cap="flat" cmpd="sng" algn="ctr">
+                      <a:solidFill>
+                        <a:schemeClr val="tx1"/>
+                      </a:solidFill>
+                      <a:prstDash val="solid"/>
+                      <a:round/>
+                      <a:headEnd type="none" w="med" len="med"/>
+                      <a:tailEnd type="none" w="med" len="med"/>
+                    </a:lnB>
+                    <a:noFill/>
+                  </a:tcPr>
+                </a:tc>
+                <a:tc>
+                  <a:txBody>
+                    <a:bodyPr/>
+                    <a:lstStyle/>
+                    <a:p>
+                      <a:r>
+                        <a:rPr lang="en-US"/>
+                        <a:t>403 xətası qaytarılır</a:t>
+                      </a:r>
+                    </a:p>
+                  </a:txBody>
+                  <a:tcPr anchor="ctr">
+                    <a:lnL w="12700" cap="flat" cmpd="sng" algn="ctr">
+                      <a:solidFill>
+                        <a:schemeClr val="tx1"/>
+                      </a:solidFill>
+                      <a:prstDash val="solid"/>
+                      <a:round/>
+                      <a:headEnd type="none" w="med" len="med"/>
+                      <a:tailEnd type="none" w="med" len="med"/>
+                    </a:lnL>
+                    <a:lnR w="12700" cap="flat" cmpd="sng" algn="ctr">
+                      <a:solidFill>
+                        <a:schemeClr val="tx1"/>
+                      </a:solidFill>
+                      <a:prstDash val="solid"/>
+                      <a:round/>
+                      <a:headEnd type="none" w="med" len="med"/>
+                      <a:tailEnd type="none" w="med" len="med"/>
+                    </a:lnR>
+                    <a:lnT w="12700" cap="flat" cmpd="sng" algn="ctr">
+                      <a:solidFill>
+                        <a:schemeClr val="tx1"/>
+                      </a:solidFill>
+                      <a:prstDash val="solid"/>
+                      <a:round/>
+                      <a:headEnd type="none" w="med" len="med"/>
+                      <a:tailEnd type="none" w="med" len="med"/>
+                    </a:lnT>
+                    <a:lnB w="12700" cap="flat" cmpd="sng" algn="ctr">
+                      <a:solidFill>
+                        <a:schemeClr val="tx1"/>
+                      </a:solidFill>
+                      <a:prstDash val="solid"/>
+                      <a:round/>
+                      <a:headEnd type="none" w="med" len="med"/>
+                      <a:tailEnd type="none" w="med" len="med"/>
+                    </a:lnB>
+                    <a:noFill/>
+                  </a:tcPr>
+                </a:tc>
+                <a:extLst>
+                  <a:ext uri="{0D108BD9-81ED-4DB2-BD59-A6C34878D82A}">
+                    <a16:rowId xmlns:a16="http://schemas.microsoft.com/office/drawing/2014/main" val="1906184655"/>
+                  </a:ext>
+                </a:extLst>
+              </a:tr>
+            </a:tbl>
+          </a:graphicData>
+        </a:graphic>
+      </p:graphicFrame>
+    </p:spTree>
+    <p:extLst>
+      <p:ext uri="{BB962C8B-B14F-4D97-AF65-F5344CB8AC3E}">
+        <p14:creationId xmlns:p14="http://schemas.microsoft.com/office/powerpoint/2010/main" val="624362025"/>
+      </p:ext>
+    </p:extLst>
+  </p:cSld>
+  <p:clrMapOvr>
+    <a:masterClrMapping/>
+  </p:clrMapOvr>
+</p:sld>
+</file>
+
+<file path=ppt/slides/slide9.xml><?xml version="1.0" encoding="utf-8"?>
+<p:sld xmlns:a="http://schemas.openxmlformats.org/drawingml/2006/main" xmlns:r="http://schemas.openxmlformats.org/officeDocument/2006/relationships" xmlns:p="http://schemas.openxmlformats.org/presentationml/2006/main">
+  <p:cSld>
+    <p:spTree>
+      <p:nvGrpSpPr>
+        <p:cNvPr id="1" name="">
+          <a:extLst>
+            <a:ext uri="{FF2B5EF4-FFF2-40B4-BE49-F238E27FC236}">
+              <a16:creationId xmlns:a16="http://schemas.microsoft.com/office/drawing/2014/main" id="{105FB13E-E0A9-15E0-5A0A-4EC0CE707DA2}"/>
+            </a:ext>
+          </a:extLst>
+        </p:cNvPr>
+        <p:cNvGrpSpPr/>
+        <p:nvPr/>
+      </p:nvGrpSpPr>
+      <p:grpSpPr>
+        <a:xfrm>
+          <a:off x="0" y="0"/>
+          <a:ext cx="0" cy="0"/>
+          <a:chOff x="0" y="0"/>
+          <a:chExt cx="0" cy="0"/>
+        </a:xfrm>
+      </p:grpSpPr>
+      <p:sp>
+        <p:nvSpPr>
+          <p:cNvPr id="3" name="TextBox 2">
+            <a:extLst>
+              <a:ext uri="{FF2B5EF4-FFF2-40B4-BE49-F238E27FC236}">
+                <a16:creationId xmlns:a16="http://schemas.microsoft.com/office/drawing/2014/main" id="{3DB11437-096E-291A-8E1C-352BFC8A4AAB}"/>
+              </a:ext>
+            </a:extLst>
+          </p:cNvPr>
+          <p:cNvSpPr txBox="1"/>
+          <p:nvPr/>
+        </p:nvSpPr>
+        <p:spPr>
+          <a:xfrm>
+            <a:off x="217714" y="255046"/>
+            <a:ext cx="11756571" cy="355354"/>
+          </a:xfrm>
+          <a:prstGeom prst="rect">
+            <a:avLst/>
+          </a:prstGeom>
+          <a:noFill/>
+        </p:spPr>
+        <p:txBody>
+          <a:bodyPr wrap="square">
+            <a:spAutoFit/>
+          </a:bodyPr>
+          <a:lstStyle/>
+          <a:p>
+            <a:pPr>
+              <a:lnSpc>
+                <a:spcPct val="150000"/>
+              </a:lnSpc>
+              <a:buNone/>
+            </a:pPr>
+            <a:r>
+              <a:rPr kumimoji="0" lang="en-US" altLang="en-US" sz="1300" b="0" i="0" u="none" strike="noStrike" cap="none" normalizeH="0" baseline="0">
+                <a:ln>
+                  <a:noFill/>
+                </a:ln>
+                <a:solidFill>
+                  <a:schemeClr val="tx1"/>
+                </a:solidFill>
+                <a:effectLst/>
+                <a:latin typeface="Arial" panose="020B0604020202020204" pitchFamily="34" charset="0"/>
+              </a:rPr>
+              <a:t>app\Providers\AuthServiceProvider.php</a:t>
+            </a:r>
+          </a:p>
+        </p:txBody>
+      </p:sp>
+      <p:pic>
+        <p:nvPicPr>
+          <p:cNvPr id="4" name="Picture 3">
+            <a:extLst>
+              <a:ext uri="{FF2B5EF4-FFF2-40B4-BE49-F238E27FC236}">
+                <a16:creationId xmlns:a16="http://schemas.microsoft.com/office/drawing/2014/main" id="{8CB82808-BB67-6C8C-D027-7A8788F233AA}"/>
+              </a:ext>
+            </a:extLst>
+          </p:cNvPr>
+          <p:cNvPicPr>
+            <a:picLocks noChangeAspect="1"/>
+          </p:cNvPicPr>
+          <p:nvPr/>
+        </p:nvPicPr>
+        <p:blipFill>
+          <a:blip r:embed="rId2"/>
+          <a:stretch>
+            <a:fillRect/>
+          </a:stretch>
+        </p:blipFill>
+        <p:spPr>
+          <a:xfrm>
+            <a:off x="6260318" y="0"/>
+            <a:ext cx="5931682" cy="6858000"/>
+          </a:xfrm>
+          <a:prstGeom prst="rect">
+            <a:avLst/>
+          </a:prstGeom>
+        </p:spPr>
+      </p:pic>
+    </p:spTree>
+    <p:extLst>
+      <p:ext uri="{BB962C8B-B14F-4D97-AF65-F5344CB8AC3E}">
+        <p14:creationId xmlns:p14="http://schemas.microsoft.com/office/powerpoint/2010/main" val="2610051096"/>
       </p:ext>
     </p:extLst>
   </p:cSld>

--- a/.lessons/29 Fundamental Authorization ( Yalnız öz yazısını silə bilər A sayılır )/2 Authorization - Gates/1.pptx
+++ b/.lessons/29 Fundamental Authorization ( Yalnız öz yazısını silə bilər A sayılır )/2 Authorization - Gates/1.pptx
@@ -3765,7 +3765,7 @@
         <p:spPr>
           <a:xfrm>
             <a:off x="217714" y="255046"/>
-            <a:ext cx="11756571" cy="355354"/>
+            <a:ext cx="11756571" cy="3656257"/>
           </a:xfrm>
           <a:prstGeom prst="rect">
             <a:avLst/>
@@ -3785,6 +3785,142 @@
               <a:buNone/>
             </a:pPr>
             <a:r>
+              <a:rPr kumimoji="0" lang="en-US" altLang="en-US" sz="1300" b="1" i="0" u="none" strike="noStrike" cap="none" normalizeH="0" baseline="0">
+                <a:ln>
+                  <a:noFill/>
+                </a:ln>
+                <a:solidFill>
+                  <a:srgbClr val="FF0000"/>
+                </a:solidFill>
+                <a:effectLst/>
+                <a:latin typeface="Arial" panose="020B0604020202020204" pitchFamily="34" charset="0"/>
+              </a:rPr>
+              <a:t>Gate ilə daha kompleks şərt nümunəsi</a:t>
+            </a:r>
+            <a:endParaRPr kumimoji="0" lang="ru-RU" altLang="en-US" sz="1300" b="1" i="0" u="none" strike="noStrike" cap="none" normalizeH="0" baseline="0">
+              <a:ln>
+                <a:noFill/>
+              </a:ln>
+              <a:solidFill>
+                <a:srgbClr val="FF0000"/>
+              </a:solidFill>
+              <a:effectLst/>
+              <a:latin typeface="Arial" panose="020B0604020202020204" pitchFamily="34" charset="0"/>
+            </a:endParaRPr>
+          </a:p>
+          <a:p>
+            <a:pPr>
+              <a:lnSpc>
+                <a:spcPct val="150000"/>
+              </a:lnSpc>
+              <a:buNone/>
+            </a:pPr>
+            <a:endParaRPr lang="ru-RU" altLang="en-US" sz="1300">
+              <a:latin typeface="Arial" panose="020B0604020202020204" pitchFamily="34" charset="0"/>
+            </a:endParaRPr>
+          </a:p>
+          <a:p>
+            <a:pPr>
+              <a:lnSpc>
+                <a:spcPct val="150000"/>
+              </a:lnSpc>
+              <a:buNone/>
+            </a:pPr>
+            <a:endParaRPr kumimoji="0" lang="ru-RU" altLang="en-US" sz="1300" b="0" i="0" u="none" strike="noStrike" cap="none" normalizeH="0" baseline="0">
+              <a:ln>
+                <a:noFill/>
+              </a:ln>
+              <a:solidFill>
+                <a:schemeClr val="tx1"/>
+              </a:solidFill>
+              <a:effectLst/>
+              <a:latin typeface="Arial" panose="020B0604020202020204" pitchFamily="34" charset="0"/>
+            </a:endParaRPr>
+          </a:p>
+          <a:p>
+            <a:pPr>
+              <a:lnSpc>
+                <a:spcPct val="150000"/>
+              </a:lnSpc>
+              <a:buNone/>
+            </a:pPr>
+            <a:endParaRPr kumimoji="0" lang="ru-RU" altLang="en-US" sz="1300" b="0" i="0" u="none" strike="noStrike" cap="none" normalizeH="0" baseline="0">
+              <a:ln>
+                <a:noFill/>
+              </a:ln>
+              <a:solidFill>
+                <a:schemeClr val="tx1"/>
+              </a:solidFill>
+              <a:effectLst/>
+              <a:latin typeface="Arial" panose="020B0604020202020204" pitchFamily="34" charset="0"/>
+            </a:endParaRPr>
+          </a:p>
+          <a:p>
+            <a:pPr>
+              <a:lnSpc>
+                <a:spcPct val="150000"/>
+              </a:lnSpc>
+              <a:buNone/>
+            </a:pPr>
+            <a:endParaRPr lang="ru-RU" altLang="en-US" sz="1300">
+              <a:latin typeface="Arial" panose="020B0604020202020204" pitchFamily="34" charset="0"/>
+            </a:endParaRPr>
+          </a:p>
+          <a:p>
+            <a:pPr>
+              <a:lnSpc>
+                <a:spcPct val="150000"/>
+              </a:lnSpc>
+              <a:buNone/>
+            </a:pPr>
+            <a:endParaRPr kumimoji="0" lang="ru-RU" altLang="en-US" sz="1300" b="0" i="0" u="none" strike="noStrike" cap="none" normalizeH="0" baseline="0">
+              <a:ln>
+                <a:noFill/>
+              </a:ln>
+              <a:solidFill>
+                <a:schemeClr val="tx1"/>
+              </a:solidFill>
+              <a:effectLst/>
+              <a:latin typeface="Arial" panose="020B0604020202020204" pitchFamily="34" charset="0"/>
+            </a:endParaRPr>
+          </a:p>
+          <a:p>
+            <a:pPr>
+              <a:lnSpc>
+                <a:spcPct val="150000"/>
+              </a:lnSpc>
+              <a:buNone/>
+            </a:pPr>
+            <a:endParaRPr lang="ru-RU" altLang="en-US" sz="1300">
+              <a:latin typeface="Arial" panose="020B0604020202020204" pitchFamily="34" charset="0"/>
+            </a:endParaRPr>
+          </a:p>
+          <a:p>
+            <a:pPr>
+              <a:lnSpc>
+                <a:spcPct val="150000"/>
+              </a:lnSpc>
+              <a:buNone/>
+            </a:pPr>
+            <a:endParaRPr kumimoji="0" lang="ru-RU" altLang="en-US" sz="1300" b="0" i="0" u="none" strike="noStrike" cap="none" normalizeH="0" baseline="0">
+              <a:ln>
+                <a:noFill/>
+              </a:ln>
+              <a:solidFill>
+                <a:schemeClr val="tx1"/>
+              </a:solidFill>
+              <a:effectLst/>
+              <a:latin typeface="Arial" panose="020B0604020202020204" pitchFamily="34" charset="0"/>
+            </a:endParaRPr>
+          </a:p>
+          <a:p>
+            <a:pPr>
+              <a:lnSpc>
+                <a:spcPct val="150000"/>
+              </a:lnSpc>
+              <a:buNone/>
+            </a:pPr>
+            <a:r>
               <a:rPr kumimoji="0" lang="en-US" altLang="en-US" sz="1300" b="0" i="0" u="none" strike="noStrike" cap="none" normalizeH="0" baseline="0">
                 <a:ln>
                   <a:noFill/>
@@ -3795,11 +3931,245 @@
                 <a:effectLst/>
                 <a:latin typeface="Arial" panose="020B0604020202020204" pitchFamily="34" charset="0"/>
               </a:rPr>
-              <a:t>.</a:t>
+              <a:t>Bu misalda artıq </a:t>
+            </a:r>
+            <a:r>
+              <a:rPr kumimoji="0" lang="en-US" altLang="en-US" sz="1300" b="1" i="0" u="none" strike="noStrike" cap="none" normalizeH="0" baseline="0">
+                <a:ln>
+                  <a:noFill/>
+                </a:ln>
+                <a:solidFill>
+                  <a:schemeClr val="tx1"/>
+                </a:solidFill>
+                <a:effectLst/>
+                <a:latin typeface="Arial" panose="020B0604020202020204" pitchFamily="34" charset="0"/>
+              </a:rPr>
+              <a:t>edit_post Gate</a:t>
+            </a:r>
+            <a:r>
+              <a:rPr kumimoji="0" lang="en-US" altLang="en-US" sz="1300" b="0" i="0" u="none" strike="noStrike" cap="none" normalizeH="0" baseline="0">
+                <a:ln>
+                  <a:noFill/>
+                </a:ln>
+                <a:solidFill>
+                  <a:schemeClr val="tx1"/>
+                </a:solidFill>
+                <a:effectLst/>
+                <a:latin typeface="Arial" panose="020B0604020202020204" pitchFamily="34" charset="0"/>
+              </a:rPr>
+              <a:t> iki parametr alır: </a:t>
+            </a:r>
+            <a:r>
+              <a:rPr kumimoji="0" lang="en-US" altLang="en-US" sz="1300" b="1" i="0" u="none" strike="noStrike" cap="none" normalizeH="0" baseline="0">
+                <a:ln>
+                  <a:noFill/>
+                </a:ln>
+                <a:solidFill>
+                  <a:schemeClr val="tx1"/>
+                </a:solidFill>
+                <a:effectLst/>
+                <a:latin typeface="Arial" panose="020B0604020202020204" pitchFamily="34" charset="0"/>
+              </a:rPr>
+              <a:t>user</a:t>
+            </a:r>
+            <a:r>
+              <a:rPr kumimoji="0" lang="en-US" altLang="en-US" sz="1300" b="0" i="0" u="none" strike="noStrike" cap="none" normalizeH="0" baseline="0">
+                <a:ln>
+                  <a:noFill/>
+                </a:ln>
+                <a:solidFill>
+                  <a:schemeClr val="tx1"/>
+                </a:solidFill>
+                <a:effectLst/>
+                <a:latin typeface="Arial" panose="020B0604020202020204" pitchFamily="34" charset="0"/>
+              </a:rPr>
+              <a:t> və </a:t>
+            </a:r>
+            <a:r>
+              <a:rPr kumimoji="0" lang="en-US" altLang="en-US" sz="1300" b="1" i="0" u="none" strike="noStrike" cap="none" normalizeH="0" baseline="0">
+                <a:ln>
+                  <a:noFill/>
+                </a:ln>
+                <a:solidFill>
+                  <a:schemeClr val="tx1"/>
+                </a:solidFill>
+                <a:effectLst/>
+                <a:latin typeface="Arial" panose="020B0604020202020204" pitchFamily="34" charset="0"/>
+              </a:rPr>
+              <a:t>post</a:t>
+            </a:r>
+            <a:r>
+              <a:rPr kumimoji="0" lang="en-US" altLang="en-US" sz="1300" b="0" i="0" u="none" strike="noStrike" cap="none" normalizeH="0" baseline="0">
+                <a:ln>
+                  <a:noFill/>
+                </a:ln>
+                <a:solidFill>
+                  <a:schemeClr val="tx1"/>
+                </a:solidFill>
+                <a:effectLst/>
+                <a:latin typeface="Arial" panose="020B0604020202020204" pitchFamily="34" charset="0"/>
+              </a:rPr>
+              <a:t>. Yəni:</a:t>
+            </a:r>
+          </a:p>
+          <a:p>
+            <a:pPr marL="742950" lvl="1" indent="-285750">
+              <a:lnSpc>
+                <a:spcPct val="150000"/>
+              </a:lnSpc>
+              <a:buFont typeface="Arial" panose="020B0604020202020204" pitchFamily="34" charset="0"/>
+              <a:buChar char="•"/>
+            </a:pPr>
+            <a:r>
+              <a:rPr kumimoji="0" lang="en-US" altLang="en-US" sz="1300" b="1" i="0" u="none" strike="noStrike" cap="none" normalizeH="0" baseline="0">
+                <a:ln>
+                  <a:noFill/>
+                </a:ln>
+                <a:solidFill>
+                  <a:schemeClr val="tx1"/>
+                </a:solidFill>
+                <a:effectLst/>
+                <a:latin typeface="Arial" panose="020B0604020202020204" pitchFamily="34" charset="0"/>
+              </a:rPr>
+              <a:t>Postun sahibi </a:t>
+            </a:r>
+            <a:r>
+              <a:rPr kumimoji="0" lang="en-US" altLang="en-US" sz="1300" b="0" i="0" u="none" strike="noStrike" cap="none" normalizeH="0" baseline="0">
+                <a:ln>
+                  <a:noFill/>
+                </a:ln>
+                <a:solidFill>
+                  <a:schemeClr val="tx1"/>
+                </a:solidFill>
+                <a:effectLst/>
+                <a:latin typeface="Arial" panose="020B0604020202020204" pitchFamily="34" charset="0"/>
+              </a:rPr>
+              <a:t>və ya </a:t>
+            </a:r>
+            <a:r>
+              <a:rPr kumimoji="0" lang="en-US" altLang="en-US" sz="1300" b="1" i="0" u="none" strike="noStrike" cap="none" normalizeH="0" baseline="0">
+                <a:ln>
+                  <a:noFill/>
+                </a:ln>
+                <a:solidFill>
+                  <a:schemeClr val="tx1"/>
+                </a:solidFill>
+                <a:effectLst/>
+                <a:latin typeface="Arial" panose="020B0604020202020204" pitchFamily="34" charset="0"/>
+              </a:rPr>
+              <a:t>admin</a:t>
+            </a:r>
+            <a:r>
+              <a:rPr kumimoji="0" lang="en-US" altLang="en-US" sz="1300" b="0" i="0" u="none" strike="noStrike" cap="none" normalizeH="0" baseline="0">
+                <a:ln>
+                  <a:noFill/>
+                </a:ln>
+                <a:solidFill>
+                  <a:schemeClr val="tx1"/>
+                </a:solidFill>
+                <a:effectLst/>
+                <a:latin typeface="Arial" panose="020B0604020202020204" pitchFamily="34" charset="0"/>
+              </a:rPr>
+              <a:t> olan redaktə edə bilər.</a:t>
+            </a:r>
+          </a:p>
+          <a:p>
+            <a:pPr>
+              <a:lnSpc>
+                <a:spcPct val="150000"/>
+              </a:lnSpc>
+              <a:buNone/>
+            </a:pPr>
+            <a:endParaRPr kumimoji="0" lang="en-US" altLang="en-US" sz="1300" b="0" i="0" u="none" strike="noStrike" cap="none" normalizeH="0" baseline="0">
+              <a:ln>
+                <a:noFill/>
+              </a:ln>
+              <a:solidFill>
+                <a:schemeClr val="tx1"/>
+              </a:solidFill>
+              <a:effectLst/>
+              <a:latin typeface="Arial" panose="020B0604020202020204" pitchFamily="34" charset="0"/>
+            </a:endParaRPr>
+          </a:p>
+          <a:p>
+            <a:pPr>
+              <a:lnSpc>
+                <a:spcPct val="150000"/>
+              </a:lnSpc>
+              <a:buNone/>
+            </a:pPr>
+            <a:r>
+              <a:rPr kumimoji="0" lang="en-US" altLang="en-US" sz="1300" b="0" i="0" u="none" strike="noStrike" cap="none" normalizeH="0" baseline="0">
+                <a:ln>
+                  <a:noFill/>
+                </a:ln>
+                <a:solidFill>
+                  <a:schemeClr val="tx1"/>
+                </a:solidFill>
+                <a:effectLst/>
+                <a:latin typeface="Arial" panose="020B0604020202020204" pitchFamily="34" charset="0"/>
+              </a:rPr>
+              <a:t>Bunu istifadə edərkən </a:t>
+            </a:r>
+            <a:r>
+              <a:rPr kumimoji="0" lang="en-US" altLang="en-US" sz="1300" b="1" i="0" u="none" strike="noStrike" cap="none" normalizeH="0" baseline="0">
+                <a:ln>
+                  <a:noFill/>
+                </a:ln>
+                <a:solidFill>
+                  <a:schemeClr val="tx1"/>
+                </a:solidFill>
+                <a:effectLst/>
+                <a:latin typeface="Arial" panose="020B0604020202020204" pitchFamily="34" charset="0"/>
+              </a:rPr>
+              <a:t>authorize('edit_post', $post) </a:t>
+            </a:r>
+            <a:r>
+              <a:rPr kumimoji="0" lang="en-US" altLang="en-US" sz="1300" b="0" i="0" u="none" strike="noStrike" cap="none" normalizeH="0" baseline="0">
+                <a:ln>
+                  <a:noFill/>
+                </a:ln>
+                <a:solidFill>
+                  <a:schemeClr val="tx1"/>
+                </a:solidFill>
+                <a:effectLst/>
+                <a:latin typeface="Arial" panose="020B0604020202020204" pitchFamily="34" charset="0"/>
+              </a:rPr>
+              <a:t>yazmalısınız.</a:t>
             </a:r>
           </a:p>
         </p:txBody>
       </p:sp>
+      <p:pic>
+        <p:nvPicPr>
+          <p:cNvPr id="4" name="Picture 3">
+            <a:extLst>
+              <a:ext uri="{FF2B5EF4-FFF2-40B4-BE49-F238E27FC236}">
+                <a16:creationId xmlns:a16="http://schemas.microsoft.com/office/drawing/2014/main" id="{6D128A76-253F-AD9A-6356-C5FBDDE3096B}"/>
+              </a:ext>
+            </a:extLst>
+          </p:cNvPr>
+          <p:cNvPicPr>
+            <a:picLocks noChangeAspect="1"/>
+          </p:cNvPicPr>
+          <p:nvPr/>
+        </p:nvPicPr>
+        <p:blipFill>
+          <a:blip r:embed="rId2"/>
+          <a:stretch>
+            <a:fillRect/>
+          </a:stretch>
+        </p:blipFill>
+        <p:spPr>
+          <a:xfrm>
+            <a:off x="217714" y="882846"/>
+            <a:ext cx="4858428" cy="1038370"/>
+          </a:xfrm>
+          <a:prstGeom prst="rect">
+            <a:avLst/>
+          </a:prstGeom>
+        </p:spPr>
+      </p:pic>
     </p:spTree>
     <p:extLst>
       <p:ext uri="{BB962C8B-B14F-4D97-AF65-F5344CB8AC3E}">
@@ -3851,7 +4221,7 @@
         <p:spPr>
           <a:xfrm>
             <a:off x="217714" y="255046"/>
-            <a:ext cx="11756571" cy="355354"/>
+            <a:ext cx="11756571" cy="3356175"/>
           </a:xfrm>
           <a:prstGeom prst="rect">
             <a:avLst/>
@@ -3871,6 +4241,41 @@
               <a:buNone/>
             </a:pPr>
             <a:r>
+              <a:rPr kumimoji="0" lang="en-US" altLang="en-US" sz="1300" b="1" i="0" u="none" strike="noStrike" cap="none" normalizeH="0" baseline="0">
+                <a:ln>
+                  <a:noFill/>
+                </a:ln>
+                <a:solidFill>
+                  <a:schemeClr val="tx1"/>
+                </a:solidFill>
+                <a:effectLst/>
+                <a:latin typeface="Arial" panose="020B0604020202020204" pitchFamily="34" charset="0"/>
+              </a:rPr>
+              <a:t>Nəticə</a:t>
+            </a:r>
+          </a:p>
+          <a:p>
+            <a:pPr marL="285750" indent="-285750">
+              <a:lnSpc>
+                <a:spcPct val="150000"/>
+              </a:lnSpc>
+              <a:buFont typeface="Arial" panose="020B0604020202020204" pitchFamily="34" charset="0"/>
+              <a:buChar char="•"/>
+            </a:pPr>
+            <a:r>
+              <a:rPr kumimoji="0" lang="en-US" altLang="en-US" sz="1300" b="1" i="0" u="none" strike="noStrike" cap="none" normalizeH="0" baseline="0">
+                <a:ln>
+                  <a:noFill/>
+                </a:ln>
+                <a:solidFill>
+                  <a:schemeClr val="tx1"/>
+                </a:solidFill>
+                <a:effectLst/>
+                <a:latin typeface="Arial" panose="020B0604020202020204" pitchFamily="34" charset="0"/>
+              </a:rPr>
+              <a:t>Gate</a:t>
+            </a:r>
+            <a:r>
               <a:rPr kumimoji="0" lang="en-US" altLang="en-US" sz="1300" b="0" i="0" u="none" strike="noStrike" cap="none" normalizeH="0" baseline="0">
                 <a:ln>
                   <a:noFill/>
@@ -3881,8 +4286,347 @@
                 <a:effectLst/>
                 <a:latin typeface="Arial" panose="020B0604020202020204" pitchFamily="34" charset="0"/>
               </a:rPr>
-              <a:t>.</a:t>
-            </a:r>
+              <a:t> sadə və çevik bir </a:t>
+            </a:r>
+            <a:r>
+              <a:rPr kumimoji="0" lang="en-US" altLang="en-US" sz="1300" b="1" i="0" u="none" strike="noStrike" cap="none" normalizeH="0" baseline="0">
+                <a:ln>
+                  <a:noFill/>
+                </a:ln>
+                <a:solidFill>
+                  <a:schemeClr val="tx1"/>
+                </a:solidFill>
+                <a:effectLst/>
+                <a:latin typeface="Arial" panose="020B0604020202020204" pitchFamily="34" charset="0"/>
+              </a:rPr>
+              <a:t>auth</a:t>
+            </a:r>
+            <a:r>
+              <a:rPr kumimoji="0" lang="en-US" altLang="en-US" sz="1300" b="0" i="0" u="none" strike="noStrike" cap="none" normalizeH="0" baseline="0">
+                <a:ln>
+                  <a:noFill/>
+                </a:ln>
+                <a:solidFill>
+                  <a:schemeClr val="tx1"/>
+                </a:solidFill>
+                <a:effectLst/>
+                <a:latin typeface="Arial" panose="020B0604020202020204" pitchFamily="34" charset="0"/>
+              </a:rPr>
+              <a:t> mexanizmidir.</a:t>
+            </a:r>
+          </a:p>
+          <a:p>
+            <a:pPr marL="285750" indent="-285750">
+              <a:lnSpc>
+                <a:spcPct val="150000"/>
+              </a:lnSpc>
+              <a:buFont typeface="Arial" panose="020B0604020202020204" pitchFamily="34" charset="0"/>
+              <a:buChar char="•"/>
+            </a:pPr>
+            <a:endParaRPr kumimoji="0" lang="en-US" altLang="en-US" sz="1300" b="0" i="0" u="none" strike="noStrike" cap="none" normalizeH="0" baseline="0">
+              <a:ln>
+                <a:noFill/>
+              </a:ln>
+              <a:solidFill>
+                <a:schemeClr val="tx1"/>
+              </a:solidFill>
+              <a:effectLst/>
+              <a:latin typeface="Arial" panose="020B0604020202020204" pitchFamily="34" charset="0"/>
+            </a:endParaRPr>
+          </a:p>
+          <a:p>
+            <a:pPr marL="285750" indent="-285750">
+              <a:lnSpc>
+                <a:spcPct val="150000"/>
+              </a:lnSpc>
+              <a:buFont typeface="Arial" panose="020B0604020202020204" pitchFamily="34" charset="0"/>
+              <a:buChar char="•"/>
+            </a:pPr>
+            <a:r>
+              <a:rPr kumimoji="0" lang="en-US" altLang="en-US" sz="1300" b="0" i="0" u="none" strike="noStrike" cap="none" normalizeH="0" baseline="0">
+                <a:ln>
+                  <a:noFill/>
+                </a:ln>
+                <a:solidFill>
+                  <a:schemeClr val="tx1"/>
+                </a:solidFill>
+                <a:effectLst/>
+                <a:latin typeface="Arial" panose="020B0604020202020204" pitchFamily="34" charset="0"/>
+              </a:rPr>
+              <a:t>Kiçik və orta səviyyəli layihələrdə (xüsusilə </a:t>
+            </a:r>
+            <a:r>
+              <a:rPr kumimoji="0" lang="en-US" altLang="en-US" sz="1300" b="1" i="0" u="none" strike="noStrike" cap="none" normalizeH="0" baseline="0">
+                <a:ln>
+                  <a:noFill/>
+                </a:ln>
+                <a:solidFill>
+                  <a:schemeClr val="tx1"/>
+                </a:solidFill>
+                <a:effectLst/>
+                <a:latin typeface="Arial" panose="020B0604020202020204" pitchFamily="34" charset="0"/>
+              </a:rPr>
+              <a:t>RBAC</a:t>
+            </a:r>
+            <a:r>
+              <a:rPr kumimoji="0" lang="en-US" altLang="en-US" sz="1300" b="0" i="0" u="none" strike="noStrike" cap="none" normalizeH="0" baseline="0">
+                <a:ln>
+                  <a:noFill/>
+                </a:ln>
+                <a:solidFill>
+                  <a:schemeClr val="tx1"/>
+                </a:solidFill>
+                <a:effectLst/>
+                <a:latin typeface="Arial" panose="020B0604020202020204" pitchFamily="34" charset="0"/>
+              </a:rPr>
+              <a:t> strukturu olan sistemlərdə) çox faydalıdır.</a:t>
+            </a:r>
+          </a:p>
+          <a:p>
+            <a:pPr marL="285750" indent="-285750">
+              <a:lnSpc>
+                <a:spcPct val="150000"/>
+              </a:lnSpc>
+              <a:buFont typeface="Arial" panose="020B0604020202020204" pitchFamily="34" charset="0"/>
+              <a:buChar char="•"/>
+            </a:pPr>
+            <a:endParaRPr kumimoji="0" lang="en-US" altLang="en-US" sz="1300" b="0" i="0" u="none" strike="noStrike" cap="none" normalizeH="0" baseline="0">
+              <a:ln>
+                <a:noFill/>
+              </a:ln>
+              <a:solidFill>
+                <a:schemeClr val="tx1"/>
+              </a:solidFill>
+              <a:effectLst/>
+              <a:latin typeface="Arial" panose="020B0604020202020204" pitchFamily="34" charset="0"/>
+            </a:endParaRPr>
+          </a:p>
+          <a:p>
+            <a:pPr marL="285750" indent="-285750">
+              <a:lnSpc>
+                <a:spcPct val="150000"/>
+              </a:lnSpc>
+              <a:buFont typeface="Arial" panose="020B0604020202020204" pitchFamily="34" charset="0"/>
+              <a:buChar char="•"/>
+            </a:pPr>
+            <a:r>
+              <a:rPr kumimoji="0" lang="en-US" altLang="en-US" sz="1300" b="0" i="0" u="none" strike="noStrike" cap="none" normalizeH="0" baseline="0">
+                <a:ln>
+                  <a:noFill/>
+                </a:ln>
+                <a:solidFill>
+                  <a:schemeClr val="tx1"/>
+                </a:solidFill>
+                <a:effectLst/>
+                <a:latin typeface="Arial" panose="020B0604020202020204" pitchFamily="34" charset="0"/>
+              </a:rPr>
+              <a:t>Kodunuzu təmiz və təhlükəsiz saxlayır – istifadəçi əməliyyatı edə bilməzsə, sistem ona avtomatik </a:t>
+            </a:r>
+            <a:r>
+              <a:rPr kumimoji="0" lang="en-US" altLang="en-US" sz="1300" b="1" i="0" u="none" strike="noStrike" cap="none" normalizeH="0" baseline="0">
+                <a:ln>
+                  <a:noFill/>
+                </a:ln>
+                <a:solidFill>
+                  <a:schemeClr val="tx1"/>
+                </a:solidFill>
+                <a:effectLst/>
+                <a:latin typeface="Arial" panose="020B0604020202020204" pitchFamily="34" charset="0"/>
+              </a:rPr>
+              <a:t>403</a:t>
+            </a:r>
+            <a:r>
+              <a:rPr kumimoji="0" lang="en-US" altLang="en-US" sz="1300" b="0" i="0" u="none" strike="noStrike" cap="none" normalizeH="0" baseline="0">
+                <a:ln>
+                  <a:noFill/>
+                </a:ln>
+                <a:solidFill>
+                  <a:schemeClr val="tx1"/>
+                </a:solidFill>
+                <a:effectLst/>
+                <a:latin typeface="Arial" panose="020B0604020202020204" pitchFamily="34" charset="0"/>
+              </a:rPr>
+              <a:t> cavabı verir.</a:t>
+            </a:r>
+          </a:p>
+          <a:p>
+            <a:pPr marL="285750" indent="-285750">
+              <a:lnSpc>
+                <a:spcPct val="150000"/>
+              </a:lnSpc>
+              <a:buFont typeface="Arial" panose="020B0604020202020204" pitchFamily="34" charset="0"/>
+              <a:buChar char="•"/>
+            </a:pPr>
+            <a:endParaRPr kumimoji="0" lang="en-US" altLang="en-US" sz="1300" b="0" i="0" u="none" strike="noStrike" cap="none" normalizeH="0" baseline="0">
+              <a:ln>
+                <a:noFill/>
+              </a:ln>
+              <a:solidFill>
+                <a:schemeClr val="tx1"/>
+              </a:solidFill>
+              <a:effectLst/>
+              <a:latin typeface="Arial" panose="020B0604020202020204" pitchFamily="34" charset="0"/>
+            </a:endParaRPr>
+          </a:p>
+          <a:p>
+            <a:pPr marL="285750" indent="-285750">
+              <a:lnSpc>
+                <a:spcPct val="150000"/>
+              </a:lnSpc>
+              <a:buFont typeface="Arial" panose="020B0604020202020204" pitchFamily="34" charset="0"/>
+              <a:buChar char="•"/>
+            </a:pPr>
+            <a:r>
+              <a:rPr kumimoji="0" lang="en-US" altLang="en-US" sz="1300" b="1" i="0" u="none" strike="noStrike" cap="none" normalizeH="0" baseline="0">
+                <a:ln>
+                  <a:noFill/>
+                </a:ln>
+                <a:solidFill>
+                  <a:schemeClr val="tx1"/>
+                </a:solidFill>
+                <a:effectLst/>
+                <a:latin typeface="Arial" panose="020B0604020202020204" pitchFamily="34" charset="0"/>
+              </a:rPr>
+              <a:t>authorize() </a:t>
+            </a:r>
+            <a:r>
+              <a:rPr kumimoji="0" lang="en-US" altLang="en-US" sz="1300" b="0" i="0" u="none" strike="noStrike" cap="none" normalizeH="0" baseline="0">
+                <a:ln>
+                  <a:noFill/>
+                </a:ln>
+                <a:solidFill>
+                  <a:schemeClr val="tx1"/>
+                </a:solidFill>
+                <a:effectLst/>
+                <a:latin typeface="Arial" panose="020B0604020202020204" pitchFamily="34" charset="0"/>
+              </a:rPr>
+              <a:t>istifadə edərək </a:t>
+            </a:r>
+            <a:r>
+              <a:rPr kumimoji="0" lang="en-US" altLang="en-US" sz="1300" b="1" i="0" u="none" strike="noStrike" cap="none" normalizeH="0" baseline="0">
+                <a:ln>
+                  <a:noFill/>
+                </a:ln>
+                <a:solidFill>
+                  <a:schemeClr val="tx1"/>
+                </a:solidFill>
+                <a:effectLst/>
+                <a:latin typeface="Arial" panose="020B0604020202020204" pitchFamily="34" charset="0"/>
+              </a:rPr>
+              <a:t>controller</a:t>
+            </a:r>
+            <a:r>
+              <a:rPr kumimoji="0" lang="en-US" altLang="en-US" sz="1300" b="0" i="0" u="none" strike="noStrike" cap="none" normalizeH="0" baseline="0">
+                <a:ln>
+                  <a:noFill/>
+                </a:ln>
+                <a:solidFill>
+                  <a:schemeClr val="tx1"/>
+                </a:solidFill>
+                <a:effectLst/>
+                <a:latin typeface="Arial" panose="020B0604020202020204" pitchFamily="34" charset="0"/>
+              </a:rPr>
+              <a:t>-lərdə, </a:t>
+            </a:r>
+            <a:r>
+              <a:rPr kumimoji="0" lang="en-US" altLang="en-US" sz="1300" b="1" i="0" u="none" strike="noStrike" cap="none" normalizeH="0" baseline="0">
+                <a:ln>
+                  <a:noFill/>
+                </a:ln>
+                <a:solidFill>
+                  <a:schemeClr val="tx1"/>
+                </a:solidFill>
+                <a:effectLst/>
+                <a:latin typeface="Arial" panose="020B0604020202020204" pitchFamily="34" charset="0"/>
+              </a:rPr>
+              <a:t>@can </a:t>
+            </a:r>
+            <a:r>
+              <a:rPr kumimoji="0" lang="en-US" altLang="en-US" sz="1300" b="0" i="0" u="none" strike="noStrike" cap="none" normalizeH="0" baseline="0">
+                <a:ln>
+                  <a:noFill/>
+                </a:ln>
+                <a:solidFill>
+                  <a:schemeClr val="tx1"/>
+                </a:solidFill>
+                <a:effectLst/>
+                <a:latin typeface="Arial" panose="020B0604020202020204" pitchFamily="34" charset="0"/>
+              </a:rPr>
+              <a:t>ilə isə </a:t>
+            </a:r>
+            <a:r>
+              <a:rPr kumimoji="0" lang="en-US" altLang="en-US" sz="1300" b="1" i="0" u="none" strike="noStrike" cap="none" normalizeH="0" baseline="0">
+                <a:ln>
+                  <a:noFill/>
+                </a:ln>
+                <a:solidFill>
+                  <a:schemeClr val="tx1"/>
+                </a:solidFill>
+                <a:effectLst/>
+                <a:latin typeface="Arial" panose="020B0604020202020204" pitchFamily="34" charset="0"/>
+              </a:rPr>
+              <a:t>view</a:t>
+            </a:r>
+            <a:r>
+              <a:rPr kumimoji="0" lang="en-US" altLang="en-US" sz="1300" b="0" i="0" u="none" strike="noStrike" cap="none" normalizeH="0" baseline="0">
+                <a:ln>
+                  <a:noFill/>
+                </a:ln>
+                <a:solidFill>
+                  <a:schemeClr val="tx1"/>
+                </a:solidFill>
+                <a:effectLst/>
+                <a:latin typeface="Arial" panose="020B0604020202020204" pitchFamily="34" charset="0"/>
+              </a:rPr>
+              <a:t>-də tətbiq olunur.</a:t>
+            </a:r>
+          </a:p>
+          <a:p>
+            <a:pPr>
+              <a:lnSpc>
+                <a:spcPct val="150000"/>
+              </a:lnSpc>
+              <a:buNone/>
+            </a:pPr>
+            <a:endParaRPr lang="en-US" altLang="en-US" sz="1300">
+              <a:latin typeface="Arial" panose="020B0604020202020204" pitchFamily="34" charset="0"/>
+            </a:endParaRPr>
+          </a:p>
+          <a:p>
+            <a:pPr>
+              <a:lnSpc>
+                <a:spcPct val="150000"/>
+              </a:lnSpc>
+              <a:buNone/>
+            </a:pPr>
+            <a:endParaRPr kumimoji="0" lang="en-US" altLang="en-US" sz="1300" b="0" i="0" u="none" strike="noStrike" cap="none" normalizeH="0" baseline="0">
+              <a:ln>
+                <a:noFill/>
+              </a:ln>
+              <a:solidFill>
+                <a:schemeClr val="tx1"/>
+              </a:solidFill>
+              <a:effectLst/>
+              <a:latin typeface="Arial" panose="020B0604020202020204" pitchFamily="34" charset="0"/>
+            </a:endParaRPr>
+          </a:p>
+          <a:p>
+            <a:pPr>
+              <a:lnSpc>
+                <a:spcPct val="150000"/>
+              </a:lnSpc>
+              <a:buNone/>
+            </a:pPr>
+            <a:endParaRPr kumimoji="0" lang="en-US" altLang="en-US" sz="1300" b="0" i="0" u="none" strike="noStrike" cap="none" normalizeH="0" baseline="0">
+              <a:ln>
+                <a:noFill/>
+              </a:ln>
+              <a:solidFill>
+                <a:schemeClr val="tx1"/>
+              </a:solidFill>
+              <a:effectLst/>
+              <a:latin typeface="Arial" panose="020B0604020202020204" pitchFamily="34" charset="0"/>
+            </a:endParaRPr>
           </a:p>
         </p:txBody>
       </p:sp>
